--- a/presentations/ifoa/ifoa_life_reference.pptx
+++ b/presentations/ifoa/ifoa_life_reference.pptx
@@ -1114,13 +1114,13 @@
             <a:spLocks noGrp="1"/>
           </p:cNvSpPr>
           <p:nvPr>
-            <p:ph type="title" hasCustomPrompt="1"/>
+            <p:ph type="ctrTitle" hasCustomPrompt="1"/>
           </p:nvPr>
         </p:nvSpPr>
         <p:spPr>
           <a:xfrm>
-            <a:off x="4186804" y="3896206"/>
-            <a:ext cx="7882392" cy="1836584"/>
+            <a:off x="2500000" y="3200000"/>
+            <a:ext cx="11256000" cy="2000000"/>
           </a:xfrm>
           <a:prstGeom prst="rect">
             <a:avLst/>
@@ -1135,7 +1135,7 @@
               <a:lnSpc>
                 <a:spcPct val="90000"/>
               </a:lnSpc>
-              <a:defRPr sz="7000" b="1" i="0">
+              <a:defRPr sz="4000" b="1" i="0">
                 <a:solidFill>
                   <a:schemeClr val="bg1"/>
                 </a:solidFill>
@@ -1157,6 +1157,57 @@
               <a:t>Conference 2026</a:t>
             </a:r>
             <a:endParaRPr lang="en-GB" dirty="0"/>
+          </a:p>
+        </p:txBody>
+      </p:sp>
+      <p:sp>
+        <p:nvSpPr>
+          <p:cNvPr id="70" name="Subtitle 2">
+            <a:extLst>
+              <a:ext uri="{FF2B5EF4-FFF2-40B4-BE49-F238E27FC236}">
+                <a16:creationId xmlns:a16="http://schemas.microsoft.com/office/drawing/2014/main" id="{6AA7276D-7192-0B34-473D-EA39E90AE911}"/>
+              </a:ext>
+            </a:extLst>
+          </p:cNvPr>
+          <p:cNvSpPr>
+            <a:spLocks noGrp="1"/>
+          </p:cNvSpPr>
+          <p:nvPr>
+            <p:ph type="subTitle" idx="1"/>
+          </p:nvPr>
+        </p:nvSpPr>
+        <p:spPr>
+          <a:xfrm>
+            <a:off x="2500000" y="5300000"/>
+            <a:ext cx="11256000" cy="2400000"/>
+          </a:xfrm>
+          <a:prstGeom prst="rect">
+            <a:avLst/>
+          </a:prstGeom>
+        </p:spPr>
+        <p:txBody>
+          <a:bodyPr vert="horz" lIns="91440" tIns="45720" rIns="91440" bIns="45720" rtlCol="0" anchor="t">
+            <a:noAutofit/>
+          </a:bodyPr>
+          <a:lstStyle>
+            <a:lvl1pPr algn="ctr">
+              <a:lnSpc>
+                <a:spcPct val="90000"/>
+              </a:lnSpc>
+              <a:defRPr sz="1800" b="0" i="0">
+                <a:solidFill>
+                  <a:schemeClr val="bg1"/>
+                </a:solidFill>
+                <a:latin typeface="Arial" panose="020B0604020202020204" pitchFamily="34" charset="0"/>
+                <a:cs typeface="Arial" panose="020B0604020202020204" pitchFamily="34" charset="0"/>
+              </a:defRPr>
+            </a:lvl1pPr>
+          </a:lstStyle>
+          <a:p>
+            <a:r>
+              <a:rPr lang="en-GB"/>
+              <a:t>Subtitle</a:t>
+            </a:r>
           </a:p>
         </p:txBody>
       </p:sp>
@@ -7710,6 +7761,46 @@
           </a:fontRef>
         </p:style>
       </p:cxnSp>
+      <p:sp>
+        <p:nvSpPr>
+          <p:cNvPr id="914" name="Title 1">
+            <a:extLst>
+              <a:ext uri="{FF2B5EF4-FFF2-40B4-BE49-F238E27FC236}">
+                <a16:creationId xmlns:a16="http://schemas.microsoft.com/office/drawing/2014/main" id="{EF499182-B1CD-4399-99FD-7B1CA914FD59}"/>
+              </a:ext>
+            </a:extLst>
+          </p:cNvPr>
+          <p:cNvSpPr>
+            <a:spLocks noGrp="1"/>
+          </p:cNvSpPr>
+          <p:nvPr>
+            <p:ph type="title" hasCustomPrompt="1"/>
+          </p:nvPr>
+        </p:nvSpPr>
+        <p:spPr>
+          <a:xfrm>
+            <a:off x="1500000" y="3400000"/>
+            <a:ext cx="13256000" cy="2200000"/>
+          </a:xfrm>
+        </p:spPr>
+        <p:txBody>
+          <a:bodyPr>
+            <a:normAutofit/>
+          </a:bodyPr>
+          <a:lstStyle>
+            <a:lvl1pPr>
+              <a:defRPr sz="4400" cap="none" baseline="0"/>
+            </a:lvl1pPr>
+          </a:lstStyle>
+          <a:p>
+            <a:r>
+              <a:rPr lang="en-US" dirty="0"/>
+              <a:t>Title</a:t>
+            </a:r>
+            <a:endParaRPr lang="en-GB" dirty="0"/>
+          </a:p>
+        </p:txBody>
+      </p:sp>
     </p:spTree>
     <p:extLst>
       <p:ext uri="{BB962C8B-B14F-4D97-AF65-F5344CB8AC3E}">

--- a/presentations/ifoa/ifoa_life_reference.pptx
+++ b/presentations/ifoa/ifoa_life_reference.pptx
@@ -3,15 +3,10 @@
 <p:presentation xmlns:a="http://schemas.openxmlformats.org/drawingml/2006/main" xmlns:r="http://schemas.openxmlformats.org/officeDocument/2006/relationships" xmlns:p="http://schemas.openxmlformats.org/presentationml/2006/main">
   <p:sldMasterIdLst>
     <p:sldMasterId id="2147484060" r:id="rId4"/>
-    <p:sldMasterId id="2147484090" r:id="rId5"/>
-    <p:sldMasterId id="2147483897" r:id="rId6"/>
   </p:sldMasterIdLst>
   <p:notesMasterIdLst>
     <p:notesMasterId r:id="rId9"/>
   </p:notesMasterIdLst>
-  <p:handoutMasterIdLst>
-    <p:handoutMasterId r:id="rId10"/>
-  </p:handoutMasterIdLst>
   <p:sldIdLst>
     <p:sldId id="302" r:id="rId7"/>
     <p:sldId id="289" r:id="rId8"/>
@@ -135,230 +130,6 @@
 </p:presentation>
 </file>
 
-<file path=ppt/authors.xml><?xml version="1.0" encoding="utf-8"?>
-<p188:authorLst xmlns:a="http://schemas.openxmlformats.org/drawingml/2006/main" xmlns:r="http://schemas.openxmlformats.org/officeDocument/2006/relationships" xmlns:p188="http://schemas.microsoft.com/office/powerpoint/2018/8/main">
-  <p188:author id="{C30D44AB-A073-7D60-BA1A-C438E60870FB}" name="Joan Grady" initials="JG" userId="S::JoanG@actuaries.org.uk::ea9b7451-2a0e-4dbc-af87-c15c24a1a3eb" providerId="AD"/>
-</p188:authorLst>
-</file>
-
-<file path=ppt/changesInfos/changesInfo1.xml><?xml version="1.0" encoding="utf-8"?>
-<pc:chgInfo xmlns:a="http://schemas.openxmlformats.org/drawingml/2006/main" xmlns:r="http://schemas.openxmlformats.org/officeDocument/2006/relationships" xmlns:ac="http://schemas.microsoft.com/office/drawing/2013/main/command" xmlns:pc="http://schemas.microsoft.com/office/powerpoint/2013/main/command">
-  <pc:docChgLst>
-    <pc:chgData name="Jemma Smith" userId="85a094ca-b438-4032-a4fe-03cdc83d4f0a" providerId="ADAL" clId="{F9376869-727D-4E34-8DE2-30DB9FC5E847}"/>
-    <pc:docChg chg="modSld delMainMaster">
-      <pc:chgData name="Jemma Smith" userId="85a094ca-b438-4032-a4fe-03cdc83d4f0a" providerId="ADAL" clId="{F9376869-727D-4E34-8DE2-30DB9FC5E847}" dt="2026-07-20T13:57:12.253" v="4" actId="20577"/>
-      <pc:docMkLst>
-        <pc:docMk/>
-      </pc:docMkLst>
-      <pc:sldChg chg="modSp mod">
-        <pc:chgData name="Jemma Smith" userId="85a094ca-b438-4032-a4fe-03cdc83d4f0a" providerId="ADAL" clId="{F9376869-727D-4E34-8DE2-30DB9FC5E847}" dt="2026-07-20T13:57:12.253" v="4" actId="20577"/>
-        <pc:sldMkLst>
-          <pc:docMk/>
-          <pc:sldMk cId="4236968464" sldId="289"/>
-        </pc:sldMkLst>
-        <pc:spChg chg="mod">
-          <ac:chgData name="Jemma Smith" userId="85a094ca-b438-4032-a4fe-03cdc83d4f0a" providerId="ADAL" clId="{F9376869-727D-4E34-8DE2-30DB9FC5E847}" dt="2026-07-20T13:57:12.253" v="4" actId="20577"/>
-          <ac:spMkLst>
-            <pc:docMk/>
-            <pc:sldMk cId="4236968464" sldId="289"/>
-            <ac:spMk id="24" creationId="{FAC9A0FB-576E-47BE-729D-0DAFE0344F79}"/>
-          </ac:spMkLst>
-        </pc:spChg>
-      </pc:sldChg>
-    </pc:docChg>
-  </pc:docChgLst>
-</pc:chgInfo>
-</file>
-
-<file path=ppt/handoutMasters/handoutMaster1.xml><?xml version="1.0" encoding="utf-8"?>
-<p:handoutMaster xmlns:a="http://schemas.openxmlformats.org/drawingml/2006/main" xmlns:r="http://schemas.openxmlformats.org/officeDocument/2006/relationships" xmlns:p="http://schemas.openxmlformats.org/presentationml/2006/main">
-  <p:cSld>
-    <p:bg>
-      <p:bgRef idx="1001">
-        <a:schemeClr val="bg1"/>
-      </p:bgRef>
-    </p:bg>
-    <p:spTree>
-      <p:nvGrpSpPr>
-        <p:cNvPr id="1" name=""/>
-        <p:cNvGrpSpPr/>
-        <p:nvPr/>
-      </p:nvGrpSpPr>
-      <p:grpSpPr>
-        <a:xfrm>
-          <a:off x="0" y="0"/>
-          <a:ext cx="0" cy="0"/>
-          <a:chOff x="0" y="0"/>
-          <a:chExt cx="0" cy="0"/>
-        </a:xfrm>
-      </p:grpSpPr>
-      <p:sp>
-        <p:nvSpPr>
-          <p:cNvPr id="2" name="Header Placeholder 1">
-            <a:extLst>
-              <a:ext uri="{FF2B5EF4-FFF2-40B4-BE49-F238E27FC236}">
-                <a16:creationId xmlns:a16="http://schemas.microsoft.com/office/drawing/2014/main" id="{12AF34AD-F03B-4FCC-A905-C259F7E7255A}"/>
-              </a:ext>
-            </a:extLst>
-          </p:cNvPr>
-          <p:cNvSpPr>
-            <a:spLocks noGrp="1"/>
-          </p:cNvSpPr>
-          <p:nvPr>
-            <p:ph type="hdr" sz="quarter"/>
-          </p:nvPr>
-        </p:nvSpPr>
-        <p:spPr>
-          <a:xfrm>
-            <a:off x="0" y="0"/>
-            <a:ext cx="7043738" cy="458788"/>
-          </a:xfrm>
-          <a:prstGeom prst="rect">
-            <a:avLst/>
-          </a:prstGeom>
-        </p:spPr>
-        <p:txBody>
-          <a:bodyPr vert="horz" lIns="91440" tIns="45720" rIns="91440" bIns="45720" rtlCol="0"/>
-          <a:lstStyle>
-            <a:lvl1pPr algn="l">
-              <a:defRPr sz="1200"/>
-            </a:lvl1pPr>
-          </a:lstStyle>
-          <a:p>
-            <a:endParaRPr lang="en-GB"/>
-          </a:p>
-        </p:txBody>
-      </p:sp>
-      <p:sp>
-        <p:nvSpPr>
-          <p:cNvPr id="3" name="Date Placeholder 2">
-            <a:extLst>
-              <a:ext uri="{FF2B5EF4-FFF2-40B4-BE49-F238E27FC236}">
-                <a16:creationId xmlns:a16="http://schemas.microsoft.com/office/drawing/2014/main" id="{17F79ADB-1ABD-4395-9516-7A28E16E51EB}"/>
-              </a:ext>
-            </a:extLst>
-          </p:cNvPr>
-          <p:cNvSpPr>
-            <a:spLocks noGrp="1"/>
-          </p:cNvSpPr>
-          <p:nvPr>
-            <p:ph type="dt" sz="quarter" idx="1"/>
-          </p:nvPr>
-        </p:nvSpPr>
-        <p:spPr>
-          <a:xfrm>
-            <a:off x="9207500" y="0"/>
-            <a:ext cx="7045325" cy="458788"/>
-          </a:xfrm>
-          <a:prstGeom prst="rect">
-            <a:avLst/>
-          </a:prstGeom>
-        </p:spPr>
-        <p:txBody>
-          <a:bodyPr vert="horz" lIns="91440" tIns="45720" rIns="91440" bIns="45720" rtlCol="0"/>
-          <a:lstStyle>
-            <a:lvl1pPr algn="r">
-              <a:defRPr sz="1200"/>
-            </a:lvl1pPr>
-          </a:lstStyle>
-          <a:p>
-            <a:fld id="{7E96F64C-A6EA-4D30-8F6F-207E6D8A5736}" type="datetimeFigureOut">
-              <a:rPr lang="en-GB" smtClean="0"/>
-              <a:t>20/07/2026</a:t>
-            </a:fld>
-            <a:endParaRPr lang="en-GB"/>
-          </a:p>
-        </p:txBody>
-      </p:sp>
-      <p:sp>
-        <p:nvSpPr>
-          <p:cNvPr id="4" name="Footer Placeholder 3">
-            <a:extLst>
-              <a:ext uri="{FF2B5EF4-FFF2-40B4-BE49-F238E27FC236}">
-                <a16:creationId xmlns:a16="http://schemas.microsoft.com/office/drawing/2014/main" id="{E7FA6EF5-6A30-48E5-86A7-B845C3DFBA4E}"/>
-              </a:ext>
-            </a:extLst>
-          </p:cNvPr>
-          <p:cNvSpPr>
-            <a:spLocks noGrp="1"/>
-          </p:cNvSpPr>
-          <p:nvPr>
-            <p:ph type="ftr" sz="quarter" idx="2"/>
-          </p:nvPr>
-        </p:nvSpPr>
-        <p:spPr>
-          <a:xfrm>
-            <a:off x="0" y="8685213"/>
-            <a:ext cx="7043738" cy="458787"/>
-          </a:xfrm>
-          <a:prstGeom prst="rect">
-            <a:avLst/>
-          </a:prstGeom>
-        </p:spPr>
-        <p:txBody>
-          <a:bodyPr vert="horz" lIns="91440" tIns="45720" rIns="91440" bIns="45720" rtlCol="0" anchor="b"/>
-          <a:lstStyle>
-            <a:lvl1pPr algn="l">
-              <a:defRPr sz="1200"/>
-            </a:lvl1pPr>
-          </a:lstStyle>
-          <a:p>
-            <a:endParaRPr lang="en-GB"/>
-          </a:p>
-        </p:txBody>
-      </p:sp>
-      <p:sp>
-        <p:nvSpPr>
-          <p:cNvPr id="5" name="Slide Number Placeholder 4">
-            <a:extLst>
-              <a:ext uri="{FF2B5EF4-FFF2-40B4-BE49-F238E27FC236}">
-                <a16:creationId xmlns:a16="http://schemas.microsoft.com/office/drawing/2014/main" id="{340FA5C3-F50C-433C-ADF9-A540F6B43840}"/>
-              </a:ext>
-            </a:extLst>
-          </p:cNvPr>
-          <p:cNvSpPr>
-            <a:spLocks noGrp="1"/>
-          </p:cNvSpPr>
-          <p:nvPr>
-            <p:ph type="sldNum" sz="quarter" idx="3"/>
-          </p:nvPr>
-        </p:nvSpPr>
-        <p:spPr>
-          <a:xfrm>
-            <a:off x="9207500" y="8685213"/>
-            <a:ext cx="7045325" cy="458787"/>
-          </a:xfrm>
-          <a:prstGeom prst="rect">
-            <a:avLst/>
-          </a:prstGeom>
-        </p:spPr>
-        <p:txBody>
-          <a:bodyPr vert="horz" lIns="91440" tIns="45720" rIns="91440" bIns="45720" rtlCol="0" anchor="b"/>
-          <a:lstStyle>
-            <a:lvl1pPr algn="r">
-              <a:defRPr sz="1200"/>
-            </a:lvl1pPr>
-          </a:lstStyle>
-          <a:p>
-            <a:fld id="{4684B978-5BC6-4E2E-9C92-7C2758F321F4}" type="slidenum">
-              <a:rPr lang="en-GB" smtClean="0"/>
-              <a:t>‹#›</a:t>
-            </a:fld>
-            <a:endParaRPr lang="en-GB"/>
-          </a:p>
-        </p:txBody>
-      </p:sp>
-    </p:spTree>
-    <p:extLst>
-      <p:ext uri="{BB962C8B-B14F-4D97-AF65-F5344CB8AC3E}">
-        <p14:creationId xmlns:p14="http://schemas.microsoft.com/office/powerpoint/2010/main" val="4122563695"/>
-      </p:ext>
-    </p:extLst>
-  </p:cSld>
-  <p:clrMap bg1="lt1" tx1="dk1" bg2="lt2" tx2="dk2" accent1="accent1" accent2="accent2" accent3="accent3" accent4="accent4" accent5="accent5" accent6="accent6" hlink="hlink" folHlink="folHlink"/>
-</p:handoutMaster>
-</file>
-
 <file path=ppt/notesMasters/notesMaster1.xml><?xml version="1.0" encoding="utf-8"?>
 <p:notesMaster xmlns:a="http://schemas.openxmlformats.org/drawingml/2006/main" xmlns:r="http://schemas.openxmlformats.org/officeDocument/2006/relationships" xmlns:p="http://schemas.openxmlformats.org/presentationml/2006/main">
   <p:cSld>
@@ -1165,7 +936,7 @@
           <p:cNvPr id="70" name="Subtitle 2">
             <a:extLst>
               <a:ext uri="{FF2B5EF4-FFF2-40B4-BE49-F238E27FC236}">
-                <a16:creationId xmlns:a16="http://schemas.microsoft.com/office/drawing/2014/main" id="{6AA7276D-7192-0B34-473D-EA39E90AE911}"/>
+                <a16:creationId xmlns:a16="http://schemas.microsoft.com/office/drawing/2014/main" id="{6AA7276D-7192-0B34-473D-EA39E90AE910}"/>
               </a:ext>
             </a:extLst>
           </p:cNvPr>
@@ -7763,7 +7534,7 @@
       </p:cxnSp>
       <p:sp>
         <p:nvSpPr>
-          <p:cNvPr id="914" name="Title 1">
+          <p:cNvPr id="97" name="Title 1">
             <a:extLst>
               <a:ext uri="{FF2B5EF4-FFF2-40B4-BE49-F238E27FC236}">
                 <a16:creationId xmlns:a16="http://schemas.microsoft.com/office/drawing/2014/main" id="{EF499182-B1CD-4399-99FD-7B1CA914FD59}"/>
@@ -10790,660 +10561,6 @@
       </p:grpSpPr>
       <p:sp>
         <p:nvSpPr>
-          <p:cNvPr id="5" name="Title Placeholder 1">
-            <a:extLst>
-              <a:ext uri="{FF2B5EF4-FFF2-40B4-BE49-F238E27FC236}">
-                <a16:creationId xmlns:a16="http://schemas.microsoft.com/office/drawing/2014/main" id="{FF25C570-C0B9-76B3-4BFD-E6B3A0571624}"/>
-              </a:ext>
-            </a:extLst>
-          </p:cNvPr>
-          <p:cNvSpPr>
-            <a:spLocks noGrp="1"/>
-          </p:cNvSpPr>
-          <p:nvPr>
-            <p:ph type="title"/>
-          </p:nvPr>
-        </p:nvSpPr>
-        <p:spPr>
-          <a:xfrm>
-            <a:off x="1117600" y="486834"/>
-            <a:ext cx="14020800" cy="1767417"/>
-          </a:xfrm>
-          <a:prstGeom prst="rect">
-            <a:avLst/>
-          </a:prstGeom>
-        </p:spPr>
-        <p:txBody>
-          <a:bodyPr vert="horz" lIns="91440" tIns="45720" rIns="91440" bIns="45720" rtlCol="0" anchor="ctr">
-            <a:normAutofit/>
-          </a:bodyPr>
-          <a:lstStyle/>
-          <a:p>
-            <a:r>
-              <a:rPr lang="en-GB" dirty="0"/>
-              <a:t>Click to edit master title style</a:t>
-            </a:r>
-          </a:p>
-        </p:txBody>
-      </p:sp>
-      <p:sp>
-        <p:nvSpPr>
-          <p:cNvPr id="6" name="Text Placeholder 2">
-            <a:extLst>
-              <a:ext uri="{FF2B5EF4-FFF2-40B4-BE49-F238E27FC236}">
-                <a16:creationId xmlns:a16="http://schemas.microsoft.com/office/drawing/2014/main" id="{A630D8FD-A6F6-6EE4-2434-A38016314418}"/>
-              </a:ext>
-            </a:extLst>
-          </p:cNvPr>
-          <p:cNvSpPr>
-            <a:spLocks noGrp="1"/>
-          </p:cNvSpPr>
-          <p:nvPr>
-            <p:ph type="body" idx="1"/>
-          </p:nvPr>
-        </p:nvSpPr>
-        <p:spPr>
-          <a:xfrm>
-            <a:off x="1117600" y="2434167"/>
-            <a:ext cx="14020800" cy="5801784"/>
-          </a:xfrm>
-          <a:prstGeom prst="rect">
-            <a:avLst/>
-          </a:prstGeom>
-        </p:spPr>
-        <p:txBody>
-          <a:bodyPr vert="horz" lIns="91440" tIns="45720" rIns="91440" bIns="45720" rtlCol="0">
-            <a:normAutofit/>
-          </a:bodyPr>
-          <a:lstStyle/>
-          <a:p>
-            <a:pPr lvl="0"/>
-            <a:r>
-              <a:rPr lang="en-GB" dirty="0"/>
-              <a:t>Click to edit Master text styles</a:t>
-            </a:r>
-          </a:p>
-          <a:p>
-            <a:pPr lvl="1"/>
-            <a:r>
-              <a:rPr lang="en-GB" dirty="0"/>
-              <a:t>Second level</a:t>
-            </a:r>
-          </a:p>
-          <a:p>
-            <a:pPr lvl="2"/>
-            <a:r>
-              <a:rPr lang="en-GB" dirty="0"/>
-              <a:t>Third level</a:t>
-            </a:r>
-          </a:p>
-          <a:p>
-            <a:pPr lvl="3"/>
-            <a:r>
-              <a:rPr lang="en-GB" dirty="0"/>
-              <a:t>Fourth level</a:t>
-            </a:r>
-          </a:p>
-          <a:p>
-            <a:pPr lvl="4"/>
-            <a:r>
-              <a:rPr lang="en-GB" dirty="0"/>
-              <a:t>Fifth level</a:t>
-            </a:r>
-          </a:p>
-        </p:txBody>
-      </p:sp>
-      <p:pic>
-        <p:nvPicPr>
-          <p:cNvPr id="7" name="Picture 6">
-            <a:extLst>
-              <a:ext uri="{FF2B5EF4-FFF2-40B4-BE49-F238E27FC236}">
-                <a16:creationId xmlns:a16="http://schemas.microsoft.com/office/drawing/2014/main" id="{BDD3F4E8-5CDA-8955-4BFE-A2FCDD5BA013}"/>
-              </a:ext>
-            </a:extLst>
-          </p:cNvPr>
-          <p:cNvPicPr>
-            <a:picLocks noChangeAspect="1"/>
-          </p:cNvPicPr>
-          <p:nvPr userDrawn="1"/>
-        </p:nvPicPr>
-        <p:blipFill>
-          <a:blip r:embed="rId3" cstate="email">
-            <a:extLst>
-              <a:ext uri="{28A0092B-C50C-407E-A947-70E740481C1C}">
-                <a14:useLocalDpi xmlns:a14="http://schemas.microsoft.com/office/drawing/2010/main" val="0"/>
-              </a:ext>
-            </a:extLst>
-          </a:blip>
-          <a:srcRect/>
-          <a:stretch/>
-        </p:blipFill>
-        <p:spPr>
-          <a:xfrm>
-            <a:off x="12850415" y="8348635"/>
-            <a:ext cx="1366353" cy="554629"/>
-          </a:xfrm>
-          <a:prstGeom prst="rect">
-            <a:avLst/>
-          </a:prstGeom>
-        </p:spPr>
-      </p:pic>
-      <p:sp>
-        <p:nvSpPr>
-          <p:cNvPr id="8" name="Footer Placeholder 4">
-            <a:extLst>
-              <a:ext uri="{FF2B5EF4-FFF2-40B4-BE49-F238E27FC236}">
-                <a16:creationId xmlns:a16="http://schemas.microsoft.com/office/drawing/2014/main" id="{ACA03778-E4AF-D519-D257-3D5B728D22F7}"/>
-              </a:ext>
-            </a:extLst>
-          </p:cNvPr>
-          <p:cNvSpPr>
-            <a:spLocks noGrp="1"/>
-          </p:cNvSpPr>
-          <p:nvPr>
-            <p:ph type="ftr" sz="quarter" idx="3"/>
-          </p:nvPr>
-        </p:nvSpPr>
-        <p:spPr>
-          <a:xfrm>
-            <a:off x="1117600" y="8382533"/>
-            <a:ext cx="11368098" cy="486833"/>
-          </a:xfrm>
-          <a:prstGeom prst="rect">
-            <a:avLst/>
-          </a:prstGeom>
-        </p:spPr>
-        <p:txBody>
-          <a:bodyPr vert="horz" lIns="91440" tIns="45720" rIns="91440" bIns="45720" rtlCol="0" anchor="ctr"/>
-          <a:lstStyle>
-            <a:lvl1pPr algn="r">
-              <a:defRPr sz="1600">
-                <a:solidFill>
-                  <a:schemeClr val="tx1"/>
-                </a:solidFill>
-              </a:defRPr>
-            </a:lvl1pPr>
-          </a:lstStyle>
-          <a:p>
-            <a:r>
-              <a:rPr lang="en-GB"/>
-              <a:t>IFoA Life Conference</a:t>
-            </a:r>
-            <a:endParaRPr lang="en-GB" dirty="0"/>
-          </a:p>
-        </p:txBody>
-      </p:sp>
-      <p:sp>
-        <p:nvSpPr>
-          <p:cNvPr id="9" name="Slide Number Placeholder 5">
-            <a:extLst>
-              <a:ext uri="{FF2B5EF4-FFF2-40B4-BE49-F238E27FC236}">
-                <a16:creationId xmlns:a16="http://schemas.microsoft.com/office/drawing/2014/main" id="{A1516921-5FEC-FB3B-75CE-FB6663376CD0}"/>
-              </a:ext>
-            </a:extLst>
-          </p:cNvPr>
-          <p:cNvSpPr>
-            <a:spLocks noGrp="1"/>
-          </p:cNvSpPr>
-          <p:nvPr>
-            <p:ph type="sldNum" sz="quarter" idx="4"/>
-          </p:nvPr>
-        </p:nvSpPr>
-        <p:spPr>
-          <a:xfrm>
-            <a:off x="14573177" y="8382533"/>
-            <a:ext cx="529680" cy="486833"/>
-          </a:xfrm>
-          <a:prstGeom prst="rect">
-            <a:avLst/>
-          </a:prstGeom>
-          <a:solidFill>
-            <a:schemeClr val="tx1"/>
-          </a:solidFill>
-        </p:spPr>
-        <p:txBody>
-          <a:bodyPr vert="horz" lIns="91440" tIns="45720" rIns="91440" bIns="45720" rtlCol="0" anchor="ctr"/>
-          <a:lstStyle>
-            <a:lvl1pPr algn="ctr">
-              <a:defRPr sz="1200" b="1" i="0">
-                <a:solidFill>
-                  <a:schemeClr val="bg1"/>
-                </a:solidFill>
-                <a:latin typeface="Arial" panose="020B0604020202020204" pitchFamily="34" charset="0"/>
-                <a:cs typeface="Arial" panose="020B0604020202020204" pitchFamily="34" charset="0"/>
-              </a:defRPr>
-            </a:lvl1pPr>
-          </a:lstStyle>
-          <a:p>
-            <a:fld id="{40FC62D0-A2F2-4BF8-8DAC-E86C11000EC3}" type="slidenum">
-              <a:rPr lang="en-GB" smtClean="0"/>
-              <a:pPr/>
-              <a:t>‹#›</a:t>
-            </a:fld>
-            <a:endParaRPr lang="en-GB" dirty="0"/>
-          </a:p>
-        </p:txBody>
-      </p:sp>
-      <p:cxnSp>
-        <p:nvCxnSpPr>
-          <p:cNvPr id="10" name="Straight Connector 9">
-            <a:extLst>
-              <a:ext uri="{FF2B5EF4-FFF2-40B4-BE49-F238E27FC236}">
-                <a16:creationId xmlns:a16="http://schemas.microsoft.com/office/drawing/2014/main" id="{5B708CF7-AFA2-B03F-3762-97D636B572D0}"/>
-              </a:ext>
-            </a:extLst>
-          </p:cNvPr>
-          <p:cNvCxnSpPr>
-            <a:cxnSpLocks/>
-          </p:cNvCxnSpPr>
-          <p:nvPr userDrawn="1"/>
-        </p:nvCxnSpPr>
-        <p:spPr>
-          <a:xfrm>
-            <a:off x="14411899" y="8360757"/>
-            <a:ext cx="0" cy="530384"/>
-          </a:xfrm>
-          <a:prstGeom prst="line">
-            <a:avLst/>
-          </a:prstGeom>
-          <a:ln w="44450">
-            <a:solidFill>
-              <a:schemeClr val="tx1"/>
-            </a:solidFill>
-          </a:ln>
-        </p:spPr>
-        <p:style>
-          <a:lnRef idx="1">
-            <a:schemeClr val="accent1"/>
-          </a:lnRef>
-          <a:fillRef idx="0">
-            <a:schemeClr val="accent1"/>
-          </a:fillRef>
-          <a:effectRef idx="0">
-            <a:schemeClr val="accent1"/>
-          </a:effectRef>
-          <a:fontRef idx="minor">
-            <a:schemeClr val="tx1"/>
-          </a:fontRef>
-        </p:style>
-      </p:cxnSp>
-      <p:cxnSp>
-        <p:nvCxnSpPr>
-          <p:cNvPr id="11" name="Straight Connector 10">
-            <a:extLst>
-              <a:ext uri="{FF2B5EF4-FFF2-40B4-BE49-F238E27FC236}">
-                <a16:creationId xmlns:a16="http://schemas.microsoft.com/office/drawing/2014/main" id="{6F886170-12CD-9DF7-29C3-124E4C5EF48A}"/>
-              </a:ext>
-            </a:extLst>
-          </p:cNvPr>
-          <p:cNvCxnSpPr>
-            <a:cxnSpLocks/>
-          </p:cNvCxnSpPr>
-          <p:nvPr userDrawn="1"/>
-        </p:nvCxnSpPr>
-        <p:spPr>
-          <a:xfrm>
-            <a:off x="12689014" y="8360757"/>
-            <a:ext cx="0" cy="530384"/>
-          </a:xfrm>
-          <a:prstGeom prst="line">
-            <a:avLst/>
-          </a:prstGeom>
-          <a:ln w="44450">
-            <a:solidFill>
-              <a:schemeClr val="tx1"/>
-            </a:solidFill>
-          </a:ln>
-        </p:spPr>
-        <p:style>
-          <a:lnRef idx="1">
-            <a:schemeClr val="accent1"/>
-          </a:lnRef>
-          <a:fillRef idx="0">
-            <a:schemeClr val="accent1"/>
-          </a:fillRef>
-          <a:effectRef idx="0">
-            <a:schemeClr val="accent1"/>
-          </a:effectRef>
-          <a:fontRef idx="minor">
-            <a:schemeClr val="tx1"/>
-          </a:fontRef>
-        </p:style>
-      </p:cxnSp>
-    </p:spTree>
-    <p:extLst>
-      <p:ext uri="{BB962C8B-B14F-4D97-AF65-F5344CB8AC3E}">
-        <p14:creationId xmlns:p14="http://schemas.microsoft.com/office/powerpoint/2010/main" val="429686094"/>
-      </p:ext>
-    </p:extLst>
-  </p:cSld>
-  <p:clrMap bg1="lt1" tx1="dk1" bg2="lt2" tx2="dk2" accent1="accent1" accent2="accent2" accent3="accent3" accent4="accent4" accent5="accent5" accent6="accent6" hlink="hlink" folHlink="folHlink"/>
-  <p:sldLayoutIdLst>
-    <p:sldLayoutId id="2147483989" r:id="rId1"/>
-  </p:sldLayoutIdLst>
-  <p:hf hdr="0" dt="0"/>
-  <p:txStyles>
-    <p:titleStyle>
-      <a:lvl1pPr algn="l" defTabSz="1219170" rtl="0" eaLnBrk="1" latinLnBrk="0" hangingPunct="1">
-        <a:lnSpc>
-          <a:spcPct val="90000"/>
-        </a:lnSpc>
-        <a:spcBef>
-          <a:spcPct val="0"/>
-        </a:spcBef>
-        <a:buNone/>
-        <a:defRPr sz="4400" b="1" i="0" kern="1200" spc="-150" baseline="0">
-          <a:solidFill>
-            <a:schemeClr val="tx1"/>
-          </a:solidFill>
-          <a:latin typeface="Arial" panose="020B0604020202020204" pitchFamily="34" charset="0"/>
-          <a:ea typeface="+mj-ea"/>
-          <a:cs typeface="Arial" panose="020B0604020202020204" pitchFamily="34" charset="0"/>
-        </a:defRPr>
-      </a:lvl1pPr>
-    </p:titleStyle>
-    <p:bodyStyle>
-      <a:lvl1pPr marL="304792" indent="-304792" algn="l" defTabSz="1219170" rtl="0" eaLnBrk="1" latinLnBrk="0" hangingPunct="1">
-        <a:lnSpc>
-          <a:spcPct val="100000"/>
-        </a:lnSpc>
-        <a:spcBef>
-          <a:spcPts val="1333"/>
-        </a:spcBef>
-        <a:buClr>
-          <a:schemeClr val="accent3"/>
-        </a:buClr>
-        <a:buFont typeface="Arial" panose="020B0604020202020204" pitchFamily="34" charset="0"/>
-        <a:buChar char="•"/>
-        <a:defRPr sz="2600" b="0" i="0" kern="1200">
-          <a:solidFill>
-            <a:schemeClr val="tx1"/>
-          </a:solidFill>
-          <a:latin typeface="Arial Light" pitchFamily="2" charset="77"/>
-          <a:ea typeface="+mn-ea"/>
-          <a:cs typeface="Arial" panose="020B0604020202020204" pitchFamily="34" charset="0"/>
-        </a:defRPr>
-      </a:lvl1pPr>
-      <a:lvl2pPr marL="914377" indent="-304792" algn="l" defTabSz="1219170" rtl="0" eaLnBrk="1" latinLnBrk="0" hangingPunct="1">
-        <a:lnSpc>
-          <a:spcPct val="100000"/>
-        </a:lnSpc>
-        <a:spcBef>
-          <a:spcPts val="667"/>
-        </a:spcBef>
-        <a:buClr>
-          <a:schemeClr val="accent3"/>
-        </a:buClr>
-        <a:buFont typeface="Arial" panose="020B0604020202020204" pitchFamily="34" charset="0"/>
-        <a:buChar char="•"/>
-        <a:defRPr sz="2600" b="0" i="0" kern="1200">
-          <a:solidFill>
-            <a:schemeClr val="tx1"/>
-          </a:solidFill>
-          <a:latin typeface="Arial Light" pitchFamily="2" charset="77"/>
-          <a:ea typeface="+mn-ea"/>
-          <a:cs typeface="Arial" panose="020B0604020202020204" pitchFamily="34" charset="0"/>
-        </a:defRPr>
-      </a:lvl2pPr>
-      <a:lvl3pPr marL="1523962" indent="-304792" algn="l" defTabSz="1219170" rtl="0" eaLnBrk="1" latinLnBrk="0" hangingPunct="1">
-        <a:lnSpc>
-          <a:spcPct val="100000"/>
-        </a:lnSpc>
-        <a:spcBef>
-          <a:spcPts val="667"/>
-        </a:spcBef>
-        <a:buClr>
-          <a:schemeClr val="accent3"/>
-        </a:buClr>
-        <a:buFont typeface="Arial" panose="020B0604020202020204" pitchFamily="34" charset="0"/>
-        <a:buChar char="•"/>
-        <a:defRPr sz="2600" b="0" i="0" kern="1200">
-          <a:solidFill>
-            <a:schemeClr val="tx1"/>
-          </a:solidFill>
-          <a:latin typeface="Arial Light" pitchFamily="2" charset="77"/>
-          <a:ea typeface="+mn-ea"/>
-          <a:cs typeface="Arial" panose="020B0604020202020204" pitchFamily="34" charset="0"/>
-        </a:defRPr>
-      </a:lvl3pPr>
-      <a:lvl4pPr marL="2133547" indent="-304792" algn="l" defTabSz="1219170" rtl="0" eaLnBrk="1" latinLnBrk="0" hangingPunct="1">
-        <a:lnSpc>
-          <a:spcPct val="100000"/>
-        </a:lnSpc>
-        <a:spcBef>
-          <a:spcPts val="667"/>
-        </a:spcBef>
-        <a:buClr>
-          <a:schemeClr val="accent3"/>
-        </a:buClr>
-        <a:buFont typeface="Arial" panose="020B0604020202020204" pitchFamily="34" charset="0"/>
-        <a:buChar char="•"/>
-        <a:defRPr sz="2600" b="0" i="0" kern="1200">
-          <a:solidFill>
-            <a:schemeClr val="tx1"/>
-          </a:solidFill>
-          <a:latin typeface="Arial Light" pitchFamily="2" charset="77"/>
-          <a:ea typeface="+mn-ea"/>
-          <a:cs typeface="Arial" panose="020B0604020202020204" pitchFamily="34" charset="0"/>
-        </a:defRPr>
-      </a:lvl4pPr>
-      <a:lvl5pPr marL="2743131" indent="-304792" algn="l" defTabSz="1219170" rtl="0" eaLnBrk="1" latinLnBrk="0" hangingPunct="1">
-        <a:lnSpc>
-          <a:spcPct val="100000"/>
-        </a:lnSpc>
-        <a:spcBef>
-          <a:spcPts val="667"/>
-        </a:spcBef>
-        <a:buClr>
-          <a:schemeClr val="accent3"/>
-        </a:buClr>
-        <a:buFont typeface="Arial" panose="020B0604020202020204" pitchFamily="34" charset="0"/>
-        <a:buChar char="•"/>
-        <a:defRPr sz="2600" b="0" i="0" kern="1200">
-          <a:solidFill>
-            <a:schemeClr val="tx1"/>
-          </a:solidFill>
-          <a:latin typeface="Arial Light" pitchFamily="2" charset="77"/>
-          <a:ea typeface="+mn-ea"/>
-          <a:cs typeface="Arial" panose="020B0604020202020204" pitchFamily="34" charset="0"/>
-        </a:defRPr>
-      </a:lvl5pPr>
-      <a:lvl6pPr marL="3352716" indent="-304792" algn="l" defTabSz="1219170" rtl="0" eaLnBrk="1" latinLnBrk="0" hangingPunct="1">
-        <a:lnSpc>
-          <a:spcPct val="90000"/>
-        </a:lnSpc>
-        <a:spcBef>
-          <a:spcPts val="667"/>
-        </a:spcBef>
-        <a:buFont typeface="Arial" panose="020B0604020202020204" pitchFamily="34" charset="0"/>
-        <a:buChar char="•"/>
-        <a:defRPr sz="2400" kern="1200">
-          <a:solidFill>
-            <a:schemeClr val="tx1"/>
-          </a:solidFill>
-          <a:latin typeface="+mn-lt"/>
-          <a:ea typeface="+mn-ea"/>
-          <a:cs typeface="+mn-cs"/>
-        </a:defRPr>
-      </a:lvl6pPr>
-      <a:lvl7pPr marL="3962301" indent="-304792" algn="l" defTabSz="1219170" rtl="0" eaLnBrk="1" latinLnBrk="0" hangingPunct="1">
-        <a:lnSpc>
-          <a:spcPct val="90000"/>
-        </a:lnSpc>
-        <a:spcBef>
-          <a:spcPts val="667"/>
-        </a:spcBef>
-        <a:buFont typeface="Arial" panose="020B0604020202020204" pitchFamily="34" charset="0"/>
-        <a:buChar char="•"/>
-        <a:defRPr sz="2400" kern="1200">
-          <a:solidFill>
-            <a:schemeClr val="tx1"/>
-          </a:solidFill>
-          <a:latin typeface="+mn-lt"/>
-          <a:ea typeface="+mn-ea"/>
-          <a:cs typeface="+mn-cs"/>
-        </a:defRPr>
-      </a:lvl7pPr>
-      <a:lvl8pPr marL="4571886" indent="-304792" algn="l" defTabSz="1219170" rtl="0" eaLnBrk="1" latinLnBrk="0" hangingPunct="1">
-        <a:lnSpc>
-          <a:spcPct val="90000"/>
-        </a:lnSpc>
-        <a:spcBef>
-          <a:spcPts val="667"/>
-        </a:spcBef>
-        <a:buFont typeface="Arial" panose="020B0604020202020204" pitchFamily="34" charset="0"/>
-        <a:buChar char="•"/>
-        <a:defRPr sz="2400" kern="1200">
-          <a:solidFill>
-            <a:schemeClr val="tx1"/>
-          </a:solidFill>
-          <a:latin typeface="+mn-lt"/>
-          <a:ea typeface="+mn-ea"/>
-          <a:cs typeface="+mn-cs"/>
-        </a:defRPr>
-      </a:lvl8pPr>
-      <a:lvl9pPr marL="5181470" indent="-304792" algn="l" defTabSz="1219170" rtl="0" eaLnBrk="1" latinLnBrk="0" hangingPunct="1">
-        <a:lnSpc>
-          <a:spcPct val="90000"/>
-        </a:lnSpc>
-        <a:spcBef>
-          <a:spcPts val="667"/>
-        </a:spcBef>
-        <a:buFont typeface="Arial" panose="020B0604020202020204" pitchFamily="34" charset="0"/>
-        <a:buChar char="•"/>
-        <a:defRPr sz="2400" kern="1200">
-          <a:solidFill>
-            <a:schemeClr val="tx1"/>
-          </a:solidFill>
-          <a:latin typeface="+mn-lt"/>
-          <a:ea typeface="+mn-ea"/>
-          <a:cs typeface="+mn-cs"/>
-        </a:defRPr>
-      </a:lvl9pPr>
-    </p:bodyStyle>
-    <p:otherStyle>
-      <a:defPPr>
-        <a:defRPr lang="en-US"/>
-      </a:defPPr>
-      <a:lvl1pPr marL="0" algn="l" defTabSz="1219170" rtl="0" eaLnBrk="1" latinLnBrk="0" hangingPunct="1">
-        <a:defRPr sz="2400" kern="1200">
-          <a:solidFill>
-            <a:schemeClr val="tx1"/>
-          </a:solidFill>
-          <a:latin typeface="+mn-lt"/>
-          <a:ea typeface="+mn-ea"/>
-          <a:cs typeface="+mn-cs"/>
-        </a:defRPr>
-      </a:lvl1pPr>
-      <a:lvl2pPr marL="609585" algn="l" defTabSz="1219170" rtl="0" eaLnBrk="1" latinLnBrk="0" hangingPunct="1">
-        <a:defRPr sz="2400" kern="1200">
-          <a:solidFill>
-            <a:schemeClr val="tx1"/>
-          </a:solidFill>
-          <a:latin typeface="+mn-lt"/>
-          <a:ea typeface="+mn-ea"/>
-          <a:cs typeface="+mn-cs"/>
-        </a:defRPr>
-      </a:lvl2pPr>
-      <a:lvl3pPr marL="1219170" algn="l" defTabSz="1219170" rtl="0" eaLnBrk="1" latinLnBrk="0" hangingPunct="1">
-        <a:defRPr sz="2400" kern="1200">
-          <a:solidFill>
-            <a:schemeClr val="tx1"/>
-          </a:solidFill>
-          <a:latin typeface="+mn-lt"/>
-          <a:ea typeface="+mn-ea"/>
-          <a:cs typeface="+mn-cs"/>
-        </a:defRPr>
-      </a:lvl3pPr>
-      <a:lvl4pPr marL="1828754" algn="l" defTabSz="1219170" rtl="0" eaLnBrk="1" latinLnBrk="0" hangingPunct="1">
-        <a:defRPr sz="2400" kern="1200">
-          <a:solidFill>
-            <a:schemeClr val="tx1"/>
-          </a:solidFill>
-          <a:latin typeface="+mn-lt"/>
-          <a:ea typeface="+mn-ea"/>
-          <a:cs typeface="+mn-cs"/>
-        </a:defRPr>
-      </a:lvl4pPr>
-      <a:lvl5pPr marL="2438339" algn="l" defTabSz="1219170" rtl="0" eaLnBrk="1" latinLnBrk="0" hangingPunct="1">
-        <a:defRPr sz="2400" kern="1200">
-          <a:solidFill>
-            <a:schemeClr val="tx1"/>
-          </a:solidFill>
-          <a:latin typeface="+mn-lt"/>
-          <a:ea typeface="+mn-ea"/>
-          <a:cs typeface="+mn-cs"/>
-        </a:defRPr>
-      </a:lvl5pPr>
-      <a:lvl6pPr marL="3047924" algn="l" defTabSz="1219170" rtl="0" eaLnBrk="1" latinLnBrk="0" hangingPunct="1">
-        <a:defRPr sz="2400" kern="1200">
-          <a:solidFill>
-            <a:schemeClr val="tx1"/>
-          </a:solidFill>
-          <a:latin typeface="+mn-lt"/>
-          <a:ea typeface="+mn-ea"/>
-          <a:cs typeface="+mn-cs"/>
-        </a:defRPr>
-      </a:lvl6pPr>
-      <a:lvl7pPr marL="3657509" algn="l" defTabSz="1219170" rtl="0" eaLnBrk="1" latinLnBrk="0" hangingPunct="1">
-        <a:defRPr sz="2400" kern="1200">
-          <a:solidFill>
-            <a:schemeClr val="tx1"/>
-          </a:solidFill>
-          <a:latin typeface="+mn-lt"/>
-          <a:ea typeface="+mn-ea"/>
-          <a:cs typeface="+mn-cs"/>
-        </a:defRPr>
-      </a:lvl7pPr>
-      <a:lvl8pPr marL="4267093" algn="l" defTabSz="1219170" rtl="0" eaLnBrk="1" latinLnBrk="0" hangingPunct="1">
-        <a:defRPr sz="2400" kern="1200">
-          <a:solidFill>
-            <a:schemeClr val="tx1"/>
-          </a:solidFill>
-          <a:latin typeface="+mn-lt"/>
-          <a:ea typeface="+mn-ea"/>
-          <a:cs typeface="+mn-cs"/>
-        </a:defRPr>
-      </a:lvl8pPr>
-      <a:lvl9pPr marL="4876678" algn="l" defTabSz="1219170" rtl="0" eaLnBrk="1" latinLnBrk="0" hangingPunct="1">
-        <a:defRPr sz="2400" kern="1200">
-          <a:solidFill>
-            <a:schemeClr val="tx1"/>
-          </a:solidFill>
-          <a:latin typeface="+mn-lt"/>
-          <a:ea typeface="+mn-ea"/>
-          <a:cs typeface="+mn-cs"/>
-        </a:defRPr>
-      </a:lvl9pPr>
-    </p:otherStyle>
-  </p:txStyles>
-</p:sldMaster>
-</file>
-
-<file path=ppt/slideMasters/slideMaster2.xml><?xml version="1.0" encoding="utf-8"?>
-<p:sldMaster xmlns:a="http://schemas.openxmlformats.org/drawingml/2006/main" xmlns:r="http://schemas.openxmlformats.org/officeDocument/2006/relationships" xmlns:p="http://schemas.openxmlformats.org/presentationml/2006/main" preserve="1">
-  <p:cSld>
-    <p:bg>
-      <p:bgRef idx="1001">
-        <a:schemeClr val="bg1"/>
-      </p:bgRef>
-    </p:bg>
-    <p:spTree>
-      <p:nvGrpSpPr>
-        <p:cNvPr id="1" name=""/>
-        <p:cNvGrpSpPr/>
-        <p:nvPr/>
-      </p:nvGrpSpPr>
-      <p:grpSpPr>
-        <a:xfrm>
-          <a:off x="0" y="0"/>
-          <a:ext cx="0" cy="0"/>
-          <a:chOff x="0" y="0"/>
-          <a:chExt cx="0" cy="0"/>
-        </a:xfrm>
-      </p:grpSpPr>
-      <p:sp>
-        <p:nvSpPr>
           <p:cNvPr id="2" name="Title Placeholder 1">
             <a:extLst>
               <a:ext uri="{FF2B5EF4-FFF2-40B4-BE49-F238E27FC236}">
@@ -11787,6 +10904,11 @@
     <p:sldLayoutId id="2147484102" r:id="rId12"/>
     <p:sldLayoutId id="2147484103" r:id="rId13"/>
     <p:sldLayoutId id="2147484104" r:id="rId14"/>
+    <p:sldLayoutId id="2147484105" r:id="rId17"/>
+    <p:sldLayoutId id="2147484106" r:id="rId18"/>
+    <p:sldLayoutId id="2147484107" r:id="rId19"/>
+    <p:sldLayoutId id="2147484108" r:id="rId20"/>
+    <p:sldLayoutId id="2147484109" r:id="rId21"/>
   </p:sldLayoutIdLst>
   <p:hf hdr="0" dt="0"/>
   <p:txStyles>
@@ -11903,663 +11025,6 @@
         </a:spcBef>
         <a:buClr>
           <a:schemeClr val="accent3"/>
-        </a:buClr>
-        <a:buFont typeface="Arial" panose="020B0604020202020204" pitchFamily="34" charset="0"/>
-        <a:buChar char="•"/>
-        <a:defRPr sz="2600" b="0" i="0" kern="1200">
-          <a:solidFill>
-            <a:schemeClr val="tx1"/>
-          </a:solidFill>
-          <a:latin typeface="Arial" panose="020B0604020202020204" pitchFamily="34" charset="0"/>
-          <a:ea typeface="+mn-ea"/>
-          <a:cs typeface="Arial" panose="020B0604020202020204" pitchFamily="34" charset="0"/>
-        </a:defRPr>
-      </a:lvl5pPr>
-      <a:lvl6pPr marL="3352716" indent="-304792" algn="l" defTabSz="1219170" rtl="0" eaLnBrk="1" latinLnBrk="0" hangingPunct="1">
-        <a:lnSpc>
-          <a:spcPct val="90000"/>
-        </a:lnSpc>
-        <a:spcBef>
-          <a:spcPts val="667"/>
-        </a:spcBef>
-        <a:buFont typeface="Arial" panose="020B0604020202020204" pitchFamily="34" charset="0"/>
-        <a:buChar char="•"/>
-        <a:defRPr sz="2400" kern="1200">
-          <a:solidFill>
-            <a:schemeClr val="tx1"/>
-          </a:solidFill>
-          <a:latin typeface="+mn-lt"/>
-          <a:ea typeface="+mn-ea"/>
-          <a:cs typeface="+mn-cs"/>
-        </a:defRPr>
-      </a:lvl6pPr>
-      <a:lvl7pPr marL="3962301" indent="-304792" algn="l" defTabSz="1219170" rtl="0" eaLnBrk="1" latinLnBrk="0" hangingPunct="1">
-        <a:lnSpc>
-          <a:spcPct val="90000"/>
-        </a:lnSpc>
-        <a:spcBef>
-          <a:spcPts val="667"/>
-        </a:spcBef>
-        <a:buFont typeface="Arial" panose="020B0604020202020204" pitchFamily="34" charset="0"/>
-        <a:buChar char="•"/>
-        <a:defRPr sz="2400" kern="1200">
-          <a:solidFill>
-            <a:schemeClr val="tx1"/>
-          </a:solidFill>
-          <a:latin typeface="+mn-lt"/>
-          <a:ea typeface="+mn-ea"/>
-          <a:cs typeface="+mn-cs"/>
-        </a:defRPr>
-      </a:lvl7pPr>
-      <a:lvl8pPr marL="4571886" indent="-304792" algn="l" defTabSz="1219170" rtl="0" eaLnBrk="1" latinLnBrk="0" hangingPunct="1">
-        <a:lnSpc>
-          <a:spcPct val="90000"/>
-        </a:lnSpc>
-        <a:spcBef>
-          <a:spcPts val="667"/>
-        </a:spcBef>
-        <a:buFont typeface="Arial" panose="020B0604020202020204" pitchFamily="34" charset="0"/>
-        <a:buChar char="•"/>
-        <a:defRPr sz="2400" kern="1200">
-          <a:solidFill>
-            <a:schemeClr val="tx1"/>
-          </a:solidFill>
-          <a:latin typeface="+mn-lt"/>
-          <a:ea typeface="+mn-ea"/>
-          <a:cs typeface="+mn-cs"/>
-        </a:defRPr>
-      </a:lvl8pPr>
-      <a:lvl9pPr marL="5181470" indent="-304792" algn="l" defTabSz="1219170" rtl="0" eaLnBrk="1" latinLnBrk="0" hangingPunct="1">
-        <a:lnSpc>
-          <a:spcPct val="90000"/>
-        </a:lnSpc>
-        <a:spcBef>
-          <a:spcPts val="667"/>
-        </a:spcBef>
-        <a:buFont typeface="Arial" panose="020B0604020202020204" pitchFamily="34" charset="0"/>
-        <a:buChar char="•"/>
-        <a:defRPr sz="2400" kern="1200">
-          <a:solidFill>
-            <a:schemeClr val="tx1"/>
-          </a:solidFill>
-          <a:latin typeface="+mn-lt"/>
-          <a:ea typeface="+mn-ea"/>
-          <a:cs typeface="+mn-cs"/>
-        </a:defRPr>
-      </a:lvl9pPr>
-    </p:bodyStyle>
-    <p:otherStyle>
-      <a:defPPr>
-        <a:defRPr lang="en-US"/>
-      </a:defPPr>
-      <a:lvl1pPr marL="0" algn="l" defTabSz="1219170" rtl="0" eaLnBrk="1" latinLnBrk="0" hangingPunct="1">
-        <a:defRPr sz="2400" kern="1200">
-          <a:solidFill>
-            <a:schemeClr val="tx1"/>
-          </a:solidFill>
-          <a:latin typeface="+mn-lt"/>
-          <a:ea typeface="+mn-ea"/>
-          <a:cs typeface="+mn-cs"/>
-        </a:defRPr>
-      </a:lvl1pPr>
-      <a:lvl2pPr marL="609585" algn="l" defTabSz="1219170" rtl="0" eaLnBrk="1" latinLnBrk="0" hangingPunct="1">
-        <a:defRPr sz="2400" kern="1200">
-          <a:solidFill>
-            <a:schemeClr val="tx1"/>
-          </a:solidFill>
-          <a:latin typeface="+mn-lt"/>
-          <a:ea typeface="+mn-ea"/>
-          <a:cs typeface="+mn-cs"/>
-        </a:defRPr>
-      </a:lvl2pPr>
-      <a:lvl3pPr marL="1219170" algn="l" defTabSz="1219170" rtl="0" eaLnBrk="1" latinLnBrk="0" hangingPunct="1">
-        <a:defRPr sz="2400" kern="1200">
-          <a:solidFill>
-            <a:schemeClr val="tx1"/>
-          </a:solidFill>
-          <a:latin typeface="+mn-lt"/>
-          <a:ea typeface="+mn-ea"/>
-          <a:cs typeface="+mn-cs"/>
-        </a:defRPr>
-      </a:lvl3pPr>
-      <a:lvl4pPr marL="1828754" algn="l" defTabSz="1219170" rtl="0" eaLnBrk="1" latinLnBrk="0" hangingPunct="1">
-        <a:defRPr sz="2400" kern="1200">
-          <a:solidFill>
-            <a:schemeClr val="tx1"/>
-          </a:solidFill>
-          <a:latin typeface="+mn-lt"/>
-          <a:ea typeface="+mn-ea"/>
-          <a:cs typeface="+mn-cs"/>
-        </a:defRPr>
-      </a:lvl4pPr>
-      <a:lvl5pPr marL="2438339" algn="l" defTabSz="1219170" rtl="0" eaLnBrk="1" latinLnBrk="0" hangingPunct="1">
-        <a:defRPr sz="2400" kern="1200">
-          <a:solidFill>
-            <a:schemeClr val="tx1"/>
-          </a:solidFill>
-          <a:latin typeface="+mn-lt"/>
-          <a:ea typeface="+mn-ea"/>
-          <a:cs typeface="+mn-cs"/>
-        </a:defRPr>
-      </a:lvl5pPr>
-      <a:lvl6pPr marL="3047924" algn="l" defTabSz="1219170" rtl="0" eaLnBrk="1" latinLnBrk="0" hangingPunct="1">
-        <a:defRPr sz="2400" kern="1200">
-          <a:solidFill>
-            <a:schemeClr val="tx1"/>
-          </a:solidFill>
-          <a:latin typeface="+mn-lt"/>
-          <a:ea typeface="+mn-ea"/>
-          <a:cs typeface="+mn-cs"/>
-        </a:defRPr>
-      </a:lvl6pPr>
-      <a:lvl7pPr marL="3657509" algn="l" defTabSz="1219170" rtl="0" eaLnBrk="1" latinLnBrk="0" hangingPunct="1">
-        <a:defRPr sz="2400" kern="1200">
-          <a:solidFill>
-            <a:schemeClr val="tx1"/>
-          </a:solidFill>
-          <a:latin typeface="+mn-lt"/>
-          <a:ea typeface="+mn-ea"/>
-          <a:cs typeface="+mn-cs"/>
-        </a:defRPr>
-      </a:lvl7pPr>
-      <a:lvl8pPr marL="4267093" algn="l" defTabSz="1219170" rtl="0" eaLnBrk="1" latinLnBrk="0" hangingPunct="1">
-        <a:defRPr sz="2400" kern="1200">
-          <a:solidFill>
-            <a:schemeClr val="tx1"/>
-          </a:solidFill>
-          <a:latin typeface="+mn-lt"/>
-          <a:ea typeface="+mn-ea"/>
-          <a:cs typeface="+mn-cs"/>
-        </a:defRPr>
-      </a:lvl8pPr>
-      <a:lvl9pPr marL="4876678" algn="l" defTabSz="1219170" rtl="0" eaLnBrk="1" latinLnBrk="0" hangingPunct="1">
-        <a:defRPr sz="2400" kern="1200">
-          <a:solidFill>
-            <a:schemeClr val="tx1"/>
-          </a:solidFill>
-          <a:latin typeface="+mn-lt"/>
-          <a:ea typeface="+mn-ea"/>
-          <a:cs typeface="+mn-cs"/>
-        </a:defRPr>
-      </a:lvl9pPr>
-    </p:otherStyle>
-  </p:txStyles>
-</p:sldMaster>
-</file>
-
-<file path=ppt/slideMasters/slideMaster3.xml><?xml version="1.0" encoding="utf-8"?>
-<p:sldMaster xmlns:a="http://schemas.openxmlformats.org/drawingml/2006/main" xmlns:r="http://schemas.openxmlformats.org/officeDocument/2006/relationships" xmlns:p="http://schemas.openxmlformats.org/presentationml/2006/main" preserve="1">
-  <p:cSld>
-    <p:bg>
-      <p:bgRef idx="1001">
-        <a:schemeClr val="bg1"/>
-      </p:bgRef>
-    </p:bg>
-    <p:spTree>
-      <p:nvGrpSpPr>
-        <p:cNvPr id="1" name=""/>
-        <p:cNvGrpSpPr/>
-        <p:nvPr/>
-      </p:nvGrpSpPr>
-      <p:grpSpPr>
-        <a:xfrm>
-          <a:off x="0" y="0"/>
-          <a:ext cx="0" cy="0"/>
-          <a:chOff x="0" y="0"/>
-          <a:chExt cx="0" cy="0"/>
-        </a:xfrm>
-      </p:grpSpPr>
-      <p:sp>
-        <p:nvSpPr>
-          <p:cNvPr id="2" name="Title Placeholder 1">
-            <a:extLst>
-              <a:ext uri="{FF2B5EF4-FFF2-40B4-BE49-F238E27FC236}">
-                <a16:creationId xmlns:a16="http://schemas.microsoft.com/office/drawing/2014/main" id="{C3F9E5E3-50B6-4FBB-92A3-9FF023DDE2C5}"/>
-              </a:ext>
-            </a:extLst>
-          </p:cNvPr>
-          <p:cNvSpPr>
-            <a:spLocks noGrp="1"/>
-          </p:cNvSpPr>
-          <p:nvPr>
-            <p:ph type="title"/>
-          </p:nvPr>
-        </p:nvSpPr>
-        <p:spPr>
-          <a:xfrm>
-            <a:off x="1117600" y="486834"/>
-            <a:ext cx="14020800" cy="1767417"/>
-          </a:xfrm>
-          <a:prstGeom prst="rect">
-            <a:avLst/>
-          </a:prstGeom>
-        </p:spPr>
-        <p:txBody>
-          <a:bodyPr vert="horz" lIns="91440" tIns="45720" rIns="91440" bIns="45720" rtlCol="0" anchor="ctr">
-            <a:normAutofit/>
-          </a:bodyPr>
-          <a:lstStyle/>
-          <a:p>
-            <a:r>
-              <a:rPr lang="en-GB" dirty="0"/>
-              <a:t>Click to edit master title style</a:t>
-            </a:r>
-          </a:p>
-        </p:txBody>
-      </p:sp>
-      <p:sp>
-        <p:nvSpPr>
-          <p:cNvPr id="3" name="Text Placeholder 2">
-            <a:extLst>
-              <a:ext uri="{FF2B5EF4-FFF2-40B4-BE49-F238E27FC236}">
-                <a16:creationId xmlns:a16="http://schemas.microsoft.com/office/drawing/2014/main" id="{CD748E6F-0121-4691-8E7F-4F7004A7CAA4}"/>
-              </a:ext>
-            </a:extLst>
-          </p:cNvPr>
-          <p:cNvSpPr>
-            <a:spLocks noGrp="1"/>
-          </p:cNvSpPr>
-          <p:nvPr>
-            <p:ph type="body" idx="1"/>
-          </p:nvPr>
-        </p:nvSpPr>
-        <p:spPr>
-          <a:xfrm>
-            <a:off x="1117600" y="2434167"/>
-            <a:ext cx="14020800" cy="5644962"/>
-          </a:xfrm>
-          <a:prstGeom prst="rect">
-            <a:avLst/>
-          </a:prstGeom>
-        </p:spPr>
-        <p:txBody>
-          <a:bodyPr vert="horz" lIns="91440" tIns="45720" rIns="91440" bIns="45720" rtlCol="0">
-            <a:normAutofit/>
-          </a:bodyPr>
-          <a:lstStyle/>
-          <a:p>
-            <a:pPr lvl="0"/>
-            <a:r>
-              <a:rPr lang="en-GB" dirty="0"/>
-              <a:t>Click to edit Master text styles</a:t>
-            </a:r>
-          </a:p>
-          <a:p>
-            <a:pPr lvl="1"/>
-            <a:r>
-              <a:rPr lang="en-GB" dirty="0"/>
-              <a:t>Second level</a:t>
-            </a:r>
-          </a:p>
-          <a:p>
-            <a:pPr lvl="2"/>
-            <a:r>
-              <a:rPr lang="en-GB" dirty="0"/>
-              <a:t>Third level</a:t>
-            </a:r>
-          </a:p>
-          <a:p>
-            <a:pPr lvl="3"/>
-            <a:r>
-              <a:rPr lang="en-GB" dirty="0"/>
-              <a:t>Fourth level</a:t>
-            </a:r>
-          </a:p>
-          <a:p>
-            <a:pPr lvl="4"/>
-            <a:r>
-              <a:rPr lang="en-GB" dirty="0"/>
-              <a:t>Fifth level</a:t>
-            </a:r>
-          </a:p>
-        </p:txBody>
-      </p:sp>
-      <p:pic>
-        <p:nvPicPr>
-          <p:cNvPr id="17" name="Picture 16">
-            <a:extLst>
-              <a:ext uri="{FF2B5EF4-FFF2-40B4-BE49-F238E27FC236}">
-                <a16:creationId xmlns:a16="http://schemas.microsoft.com/office/drawing/2014/main" id="{342F200D-848E-FCA7-CEE7-C3A16BDD429D}"/>
-              </a:ext>
-            </a:extLst>
-          </p:cNvPr>
-          <p:cNvPicPr>
-            <a:picLocks noChangeAspect="1"/>
-          </p:cNvPicPr>
-          <p:nvPr userDrawn="1"/>
-        </p:nvPicPr>
-        <p:blipFill>
-          <a:blip r:embed="rId6" cstate="email">
-            <a:extLst>
-              <a:ext uri="{28A0092B-C50C-407E-A947-70E740481C1C}">
-                <a14:useLocalDpi xmlns:a14="http://schemas.microsoft.com/office/drawing/2010/main" val="0"/>
-              </a:ext>
-            </a:extLst>
-          </a:blip>
-          <a:srcRect/>
-          <a:stretch/>
-        </p:blipFill>
-        <p:spPr>
-          <a:xfrm>
-            <a:off x="12850415" y="8348635"/>
-            <a:ext cx="1366353" cy="554629"/>
-          </a:xfrm>
-          <a:prstGeom prst="rect">
-            <a:avLst/>
-          </a:prstGeom>
-        </p:spPr>
-      </p:pic>
-      <p:sp>
-        <p:nvSpPr>
-          <p:cNvPr id="18" name="Footer Placeholder 4">
-            <a:extLst>
-              <a:ext uri="{FF2B5EF4-FFF2-40B4-BE49-F238E27FC236}">
-                <a16:creationId xmlns:a16="http://schemas.microsoft.com/office/drawing/2014/main" id="{BD97F80B-912B-9BAB-E4A2-3A8BC133603E}"/>
-              </a:ext>
-            </a:extLst>
-          </p:cNvPr>
-          <p:cNvSpPr>
-            <a:spLocks noGrp="1"/>
-          </p:cNvSpPr>
-          <p:nvPr>
-            <p:ph type="ftr" sz="quarter" idx="3"/>
-          </p:nvPr>
-        </p:nvSpPr>
-        <p:spPr>
-          <a:xfrm>
-            <a:off x="1117600" y="8382533"/>
-            <a:ext cx="11368098" cy="486833"/>
-          </a:xfrm>
-          <a:prstGeom prst="rect">
-            <a:avLst/>
-          </a:prstGeom>
-        </p:spPr>
-        <p:txBody>
-          <a:bodyPr vert="horz" lIns="91440" tIns="45720" rIns="91440" bIns="45720" rtlCol="0" anchor="ctr"/>
-          <a:lstStyle>
-            <a:lvl1pPr algn="r">
-              <a:defRPr sz="1600">
-                <a:solidFill>
-                  <a:schemeClr val="tx1"/>
-                </a:solidFill>
-              </a:defRPr>
-            </a:lvl1pPr>
-          </a:lstStyle>
-          <a:p>
-            <a:r>
-              <a:rPr lang="en-GB"/>
-              <a:t>IFoA Life Conference</a:t>
-            </a:r>
-            <a:endParaRPr lang="en-GB" dirty="0"/>
-          </a:p>
-        </p:txBody>
-      </p:sp>
-      <p:sp>
-        <p:nvSpPr>
-          <p:cNvPr id="19" name="Slide Number Placeholder 5">
-            <a:extLst>
-              <a:ext uri="{FF2B5EF4-FFF2-40B4-BE49-F238E27FC236}">
-                <a16:creationId xmlns:a16="http://schemas.microsoft.com/office/drawing/2014/main" id="{0C107E2B-92C7-C410-9DB1-828DE7DBBB1A}"/>
-              </a:ext>
-            </a:extLst>
-          </p:cNvPr>
-          <p:cNvSpPr>
-            <a:spLocks noGrp="1"/>
-          </p:cNvSpPr>
-          <p:nvPr>
-            <p:ph type="sldNum" sz="quarter" idx="4"/>
-          </p:nvPr>
-        </p:nvSpPr>
-        <p:spPr>
-          <a:xfrm>
-            <a:off x="14573177" y="8382533"/>
-            <a:ext cx="529680" cy="486833"/>
-          </a:xfrm>
-          <a:prstGeom prst="rect">
-            <a:avLst/>
-          </a:prstGeom>
-          <a:solidFill>
-            <a:schemeClr val="tx1"/>
-          </a:solidFill>
-        </p:spPr>
-        <p:txBody>
-          <a:bodyPr vert="horz" lIns="91440" tIns="45720" rIns="91440" bIns="45720" rtlCol="0" anchor="ctr"/>
-          <a:lstStyle>
-            <a:lvl1pPr algn="ctr">
-              <a:defRPr sz="1200" b="1" i="0">
-                <a:solidFill>
-                  <a:schemeClr val="bg1"/>
-                </a:solidFill>
-                <a:latin typeface="Arial" panose="020B0604020202020204" pitchFamily="34" charset="0"/>
-                <a:cs typeface="Arial" panose="020B0604020202020204" pitchFamily="34" charset="0"/>
-              </a:defRPr>
-            </a:lvl1pPr>
-          </a:lstStyle>
-          <a:p>
-            <a:fld id="{40FC62D0-A2F2-4BF8-8DAC-E86C11000EC3}" type="slidenum">
-              <a:rPr lang="en-GB" smtClean="0"/>
-              <a:pPr/>
-              <a:t>‹#›</a:t>
-            </a:fld>
-            <a:endParaRPr lang="en-GB" dirty="0"/>
-          </a:p>
-        </p:txBody>
-      </p:sp>
-      <p:cxnSp>
-        <p:nvCxnSpPr>
-          <p:cNvPr id="20" name="Straight Connector 19">
-            <a:extLst>
-              <a:ext uri="{FF2B5EF4-FFF2-40B4-BE49-F238E27FC236}">
-                <a16:creationId xmlns:a16="http://schemas.microsoft.com/office/drawing/2014/main" id="{98974C6E-57E6-DAC2-B12F-C7C5F8AA94F5}"/>
-              </a:ext>
-            </a:extLst>
-          </p:cNvPr>
-          <p:cNvCxnSpPr>
-            <a:cxnSpLocks/>
-          </p:cNvCxnSpPr>
-          <p:nvPr userDrawn="1"/>
-        </p:nvCxnSpPr>
-        <p:spPr>
-          <a:xfrm>
-            <a:off x="14411899" y="8360757"/>
-            <a:ext cx="0" cy="530384"/>
-          </a:xfrm>
-          <a:prstGeom prst="line">
-            <a:avLst/>
-          </a:prstGeom>
-          <a:ln w="44450">
-            <a:solidFill>
-              <a:schemeClr val="tx1"/>
-            </a:solidFill>
-          </a:ln>
-        </p:spPr>
-        <p:style>
-          <a:lnRef idx="1">
-            <a:schemeClr val="accent1"/>
-          </a:lnRef>
-          <a:fillRef idx="0">
-            <a:schemeClr val="accent1"/>
-          </a:fillRef>
-          <a:effectRef idx="0">
-            <a:schemeClr val="accent1"/>
-          </a:effectRef>
-          <a:fontRef idx="minor">
-            <a:schemeClr val="tx1"/>
-          </a:fontRef>
-        </p:style>
-      </p:cxnSp>
-      <p:cxnSp>
-        <p:nvCxnSpPr>
-          <p:cNvPr id="21" name="Straight Connector 20">
-            <a:extLst>
-              <a:ext uri="{FF2B5EF4-FFF2-40B4-BE49-F238E27FC236}">
-                <a16:creationId xmlns:a16="http://schemas.microsoft.com/office/drawing/2014/main" id="{E70E9DA1-EA1C-F4E2-697B-CF7B512536B1}"/>
-              </a:ext>
-            </a:extLst>
-          </p:cNvPr>
-          <p:cNvCxnSpPr>
-            <a:cxnSpLocks/>
-          </p:cNvCxnSpPr>
-          <p:nvPr userDrawn="1"/>
-        </p:nvCxnSpPr>
-        <p:spPr>
-          <a:xfrm>
-            <a:off x="12689014" y="8360757"/>
-            <a:ext cx="0" cy="530384"/>
-          </a:xfrm>
-          <a:prstGeom prst="line">
-            <a:avLst/>
-          </a:prstGeom>
-          <a:ln w="44450">
-            <a:solidFill>
-              <a:schemeClr val="tx1"/>
-            </a:solidFill>
-          </a:ln>
-        </p:spPr>
-        <p:style>
-          <a:lnRef idx="1">
-            <a:schemeClr val="accent1"/>
-          </a:lnRef>
-          <a:fillRef idx="0">
-            <a:schemeClr val="accent1"/>
-          </a:fillRef>
-          <a:effectRef idx="0">
-            <a:schemeClr val="accent1"/>
-          </a:effectRef>
-          <a:fontRef idx="minor">
-            <a:schemeClr val="tx1"/>
-          </a:fontRef>
-        </p:style>
-      </p:cxnSp>
-    </p:spTree>
-    <p:extLst>
-      <p:ext uri="{BB962C8B-B14F-4D97-AF65-F5344CB8AC3E}">
-        <p14:creationId xmlns:p14="http://schemas.microsoft.com/office/powerpoint/2010/main" val="3919549632"/>
-      </p:ext>
-    </p:extLst>
-  </p:cSld>
-  <p:clrMap bg1="lt1" tx1="dk1" bg2="lt2" tx2="dk2" accent1="accent1" accent2="accent2" accent3="accent3" accent4="accent4" accent5="accent5" accent6="accent6" hlink="hlink" folHlink="folHlink"/>
-  <p:sldLayoutIdLst>
-    <p:sldLayoutId id="2147483898" r:id="rId1"/>
-    <p:sldLayoutId id="2147483899" r:id="rId2"/>
-    <p:sldLayoutId id="2147484133" r:id="rId3"/>
-    <p:sldLayoutId id="2147484109" r:id="rId4"/>
-  </p:sldLayoutIdLst>
-  <p:hf hdr="0" dt="0"/>
-  <p:txStyles>
-    <p:titleStyle>
-      <a:lvl1pPr algn="l" defTabSz="1219170" rtl="0" eaLnBrk="1" latinLnBrk="0" hangingPunct="1">
-        <a:lnSpc>
-          <a:spcPct val="90000"/>
-        </a:lnSpc>
-        <a:spcBef>
-          <a:spcPct val="0"/>
-        </a:spcBef>
-        <a:buNone/>
-        <a:defRPr sz="4400" b="1" i="0" kern="1200" spc="-150" baseline="0">
-          <a:solidFill>
-            <a:schemeClr val="tx1"/>
-          </a:solidFill>
-          <a:latin typeface="Arial" panose="020B0604020202020204" pitchFamily="34" charset="0"/>
-          <a:ea typeface="+mj-ea"/>
-          <a:cs typeface="Arial" panose="020B0604020202020204" pitchFamily="34" charset="0"/>
-        </a:defRPr>
-      </a:lvl1pPr>
-    </p:titleStyle>
-    <p:bodyStyle>
-      <a:lvl1pPr marL="304792" indent="-304792" algn="l" defTabSz="1219170" rtl="0" eaLnBrk="1" latinLnBrk="0" hangingPunct="1">
-        <a:lnSpc>
-          <a:spcPct val="100000"/>
-        </a:lnSpc>
-        <a:spcBef>
-          <a:spcPts val="1333"/>
-        </a:spcBef>
-        <a:buClr>
-          <a:schemeClr val="accent1"/>
-        </a:buClr>
-        <a:buFont typeface="Arial" panose="020B0604020202020204" pitchFamily="34" charset="0"/>
-        <a:buChar char="•"/>
-        <a:defRPr sz="2600" b="0" i="0" kern="1200">
-          <a:solidFill>
-            <a:schemeClr val="tx1"/>
-          </a:solidFill>
-          <a:latin typeface="Arial" panose="020B0604020202020204" pitchFamily="34" charset="0"/>
-          <a:ea typeface="+mn-ea"/>
-          <a:cs typeface="Arial" panose="020B0604020202020204" pitchFamily="34" charset="0"/>
-        </a:defRPr>
-      </a:lvl1pPr>
-      <a:lvl2pPr marL="914377" indent="-304792" algn="l" defTabSz="1219170" rtl="0" eaLnBrk="1" latinLnBrk="0" hangingPunct="1">
-        <a:lnSpc>
-          <a:spcPct val="100000"/>
-        </a:lnSpc>
-        <a:spcBef>
-          <a:spcPts val="667"/>
-        </a:spcBef>
-        <a:buClr>
-          <a:schemeClr val="accent1"/>
-        </a:buClr>
-        <a:buFont typeface="Arial" panose="020B0604020202020204" pitchFamily="34" charset="0"/>
-        <a:buChar char="•"/>
-        <a:defRPr sz="2600" b="0" i="0" kern="1200">
-          <a:solidFill>
-            <a:schemeClr val="tx1"/>
-          </a:solidFill>
-          <a:latin typeface="Arial" panose="020B0604020202020204" pitchFamily="34" charset="0"/>
-          <a:ea typeface="+mn-ea"/>
-          <a:cs typeface="Arial" panose="020B0604020202020204" pitchFamily="34" charset="0"/>
-        </a:defRPr>
-      </a:lvl2pPr>
-      <a:lvl3pPr marL="1523962" indent="-304792" algn="l" defTabSz="1219170" rtl="0" eaLnBrk="1" latinLnBrk="0" hangingPunct="1">
-        <a:lnSpc>
-          <a:spcPct val="100000"/>
-        </a:lnSpc>
-        <a:spcBef>
-          <a:spcPts val="667"/>
-        </a:spcBef>
-        <a:buClr>
-          <a:schemeClr val="accent1"/>
-        </a:buClr>
-        <a:buFont typeface="Arial" panose="020B0604020202020204" pitchFamily="34" charset="0"/>
-        <a:buChar char="•"/>
-        <a:defRPr sz="2600" b="0" i="0" kern="1200">
-          <a:solidFill>
-            <a:schemeClr val="tx1"/>
-          </a:solidFill>
-          <a:latin typeface="Arial" panose="020B0604020202020204" pitchFamily="34" charset="0"/>
-          <a:ea typeface="+mn-ea"/>
-          <a:cs typeface="Arial" panose="020B0604020202020204" pitchFamily="34" charset="0"/>
-        </a:defRPr>
-      </a:lvl3pPr>
-      <a:lvl4pPr marL="2133547" indent="-304792" algn="l" defTabSz="1219170" rtl="0" eaLnBrk="1" latinLnBrk="0" hangingPunct="1">
-        <a:lnSpc>
-          <a:spcPct val="100000"/>
-        </a:lnSpc>
-        <a:spcBef>
-          <a:spcPts val="667"/>
-        </a:spcBef>
-        <a:buClr>
-          <a:schemeClr val="accent1"/>
-        </a:buClr>
-        <a:buFont typeface="Arial" panose="020B0604020202020204" pitchFamily="34" charset="0"/>
-        <a:buChar char="•"/>
-        <a:defRPr sz="2600" b="0" i="0" kern="1200">
-          <a:solidFill>
-            <a:schemeClr val="tx1"/>
-          </a:solidFill>
-          <a:latin typeface="Arial" panose="020B0604020202020204" pitchFamily="34" charset="0"/>
-          <a:ea typeface="+mn-ea"/>
-          <a:cs typeface="Arial" panose="020B0604020202020204" pitchFamily="34" charset="0"/>
-        </a:defRPr>
-      </a:lvl4pPr>
-      <a:lvl5pPr marL="2743131" indent="-304792" algn="l" defTabSz="1219170" rtl="0" eaLnBrk="1" latinLnBrk="0" hangingPunct="1">
-        <a:lnSpc>
-          <a:spcPct val="100000"/>
-        </a:lnSpc>
-        <a:spcBef>
-          <a:spcPts val="667"/>
-        </a:spcBef>
-        <a:buClr>
-          <a:schemeClr val="accent1"/>
         </a:buClr>
         <a:buFont typeface="Arial" panose="020B0604020202020204" pitchFamily="34" charset="0"/>
         <a:buChar char="•"/>
@@ -14536,267 +13001,6 @@
       </a:hlink>
       <a:folHlink>
         <a:srgbClr val="829AAC"/>
-      </a:folHlink>
-    </a:clrScheme>
-    <a:fontScheme name="Arial">
-      <a:majorFont>
-        <a:latin typeface="Arial" panose="020B0604020202020204"/>
-        <a:ea typeface=""/>
-        <a:cs typeface=""/>
-        <a:font script="Jpan" typeface="ＭＳ Ｐゴシック"/>
-        <a:font script="Hang" typeface="굴림"/>
-        <a:font script="Hans" typeface="黑体"/>
-        <a:font script="Hant" typeface="微軟正黑體"/>
-        <a:font script="Arab" typeface="Arial"/>
-        <a:font script="Hebr" typeface="Arial"/>
-        <a:font script="Thai" typeface="Cordia New"/>
-        <a:font script="Ethi" typeface="Nyala"/>
-        <a:font script="Beng" typeface="Vrinda"/>
-        <a:font script="Gujr" typeface="Shruti"/>
-        <a:font script="Khmr" typeface="DaunPenh"/>
-        <a:font script="Knda" typeface="Tunga"/>
-        <a:font script="Guru" typeface="Raavi"/>
-        <a:font script="Cans" typeface="Euphemia"/>
-        <a:font script="Cher" typeface="Plantagenet Cherokee"/>
-        <a:font script="Yiii" typeface="Microsoft Yi Baiti"/>
-        <a:font script="Tibt" typeface="Microsoft Himalaya"/>
-        <a:font script="Thaa" typeface="MV Boli"/>
-        <a:font script="Deva" typeface="Mangal"/>
-        <a:font script="Telu" typeface="Gautami"/>
-        <a:font script="Taml" typeface="Latha"/>
-        <a:font script="Syrc" typeface="Estrangelo Edessa"/>
-        <a:font script="Orya" typeface="Kalinga"/>
-        <a:font script="Mlym" typeface="Kartika"/>
-        <a:font script="Laoo" typeface="DokChampa"/>
-        <a:font script="Sinh" typeface="Iskoola Pota"/>
-        <a:font script="Mong" typeface="Mongolian Baiti"/>
-        <a:font script="Viet" typeface="Arial"/>
-        <a:font script="Uigh" typeface="Microsoft Uighur"/>
-        <a:font script="Geor" typeface="Sylfaen"/>
-      </a:majorFont>
-      <a:minorFont>
-        <a:latin typeface="Arial" panose="020B0604020202020204"/>
-        <a:ea typeface=""/>
-        <a:cs typeface=""/>
-        <a:font script="Jpan" typeface="ＭＳ Ｐゴシック"/>
-        <a:font script="Hang" typeface="굴림"/>
-        <a:font script="Hans" typeface="黑体"/>
-        <a:font script="Hant" typeface="微軟正黑體"/>
-        <a:font script="Arab" typeface="Arial"/>
-        <a:font script="Hebr" typeface="Arial"/>
-        <a:font script="Thai" typeface="Cordia New"/>
-        <a:font script="Ethi" typeface="Nyala"/>
-        <a:font script="Beng" typeface="Vrinda"/>
-        <a:font script="Gujr" typeface="Shruti"/>
-        <a:font script="Khmr" typeface="DaunPenh"/>
-        <a:font script="Knda" typeface="Tunga"/>
-        <a:font script="Guru" typeface="Raavi"/>
-        <a:font script="Cans" typeface="Euphemia"/>
-        <a:font script="Cher" typeface="Plantagenet Cherokee"/>
-        <a:font script="Yiii" typeface="Microsoft Yi Baiti"/>
-        <a:font script="Tibt" typeface="Microsoft Himalaya"/>
-        <a:font script="Thaa" typeface="MV Boli"/>
-        <a:font script="Deva" typeface="Mangal"/>
-        <a:font script="Telu" typeface="Gautami"/>
-        <a:font script="Taml" typeface="Latha"/>
-        <a:font script="Syrc" typeface="Estrangelo Edessa"/>
-        <a:font script="Orya" typeface="Kalinga"/>
-        <a:font script="Mlym" typeface="Kartika"/>
-        <a:font script="Laoo" typeface="DokChampa"/>
-        <a:font script="Sinh" typeface="Iskoola Pota"/>
-        <a:font script="Mong" typeface="Mongolian Baiti"/>
-        <a:font script="Viet" typeface="Arial"/>
-        <a:font script="Uigh" typeface="Microsoft Uighur"/>
-        <a:font script="Geor" typeface="Sylfaen"/>
-      </a:minorFont>
-    </a:fontScheme>
-    <a:fmtScheme name="Office">
-      <a:fillStyleLst>
-        <a:solidFill>
-          <a:schemeClr val="phClr"/>
-        </a:solidFill>
-        <a:gradFill rotWithShape="1">
-          <a:gsLst>
-            <a:gs pos="0">
-              <a:schemeClr val="phClr">
-                <a:lumMod val="110000"/>
-                <a:satMod val="105000"/>
-                <a:tint val="67000"/>
-              </a:schemeClr>
-            </a:gs>
-            <a:gs pos="50000">
-              <a:schemeClr val="phClr">
-                <a:lumMod val="105000"/>
-                <a:satMod val="103000"/>
-                <a:tint val="73000"/>
-              </a:schemeClr>
-            </a:gs>
-            <a:gs pos="100000">
-              <a:schemeClr val="phClr">
-                <a:lumMod val="105000"/>
-                <a:satMod val="109000"/>
-                <a:tint val="81000"/>
-              </a:schemeClr>
-            </a:gs>
-          </a:gsLst>
-          <a:lin ang="5400000" scaled="0"/>
-        </a:gradFill>
-        <a:gradFill rotWithShape="1">
-          <a:gsLst>
-            <a:gs pos="0">
-              <a:schemeClr val="phClr">
-                <a:satMod val="103000"/>
-                <a:lumMod val="102000"/>
-                <a:tint val="94000"/>
-              </a:schemeClr>
-            </a:gs>
-            <a:gs pos="50000">
-              <a:schemeClr val="phClr">
-                <a:satMod val="110000"/>
-                <a:lumMod val="100000"/>
-                <a:shade val="100000"/>
-              </a:schemeClr>
-            </a:gs>
-            <a:gs pos="100000">
-              <a:schemeClr val="phClr">
-                <a:lumMod val="99000"/>
-                <a:satMod val="120000"/>
-                <a:shade val="78000"/>
-              </a:schemeClr>
-            </a:gs>
-          </a:gsLst>
-          <a:lin ang="5400000" scaled="0"/>
-        </a:gradFill>
-      </a:fillStyleLst>
-      <a:lnStyleLst>
-        <a:ln w="6350" cap="flat" cmpd="sng" algn="ctr">
-          <a:solidFill>
-            <a:schemeClr val="phClr"/>
-          </a:solidFill>
-          <a:prstDash val="solid"/>
-          <a:miter lim="800000"/>
-        </a:ln>
-        <a:ln w="12700" cap="flat" cmpd="sng" algn="ctr">
-          <a:solidFill>
-            <a:schemeClr val="phClr"/>
-          </a:solidFill>
-          <a:prstDash val="solid"/>
-          <a:miter lim="800000"/>
-        </a:ln>
-        <a:ln w="19050" cap="flat" cmpd="sng" algn="ctr">
-          <a:solidFill>
-            <a:schemeClr val="phClr"/>
-          </a:solidFill>
-          <a:prstDash val="solid"/>
-          <a:miter lim="800000"/>
-        </a:ln>
-      </a:lnStyleLst>
-      <a:effectStyleLst>
-        <a:effectStyle>
-          <a:effectLst/>
-        </a:effectStyle>
-        <a:effectStyle>
-          <a:effectLst/>
-        </a:effectStyle>
-        <a:effectStyle>
-          <a:effectLst>
-            <a:outerShdw blurRad="57150" dist="19050" dir="5400000" algn="ctr" rotWithShape="0">
-              <a:srgbClr val="000000">
-                <a:alpha val="63000"/>
-              </a:srgbClr>
-            </a:outerShdw>
-          </a:effectLst>
-        </a:effectStyle>
-      </a:effectStyleLst>
-      <a:bgFillStyleLst>
-        <a:solidFill>
-          <a:schemeClr val="phClr"/>
-        </a:solidFill>
-        <a:solidFill>
-          <a:schemeClr val="phClr">
-            <a:tint val="95000"/>
-            <a:satMod val="170000"/>
-          </a:schemeClr>
-        </a:solidFill>
-        <a:gradFill rotWithShape="1">
-          <a:gsLst>
-            <a:gs pos="0">
-              <a:schemeClr val="phClr">
-                <a:tint val="93000"/>
-                <a:satMod val="150000"/>
-                <a:shade val="98000"/>
-                <a:lumMod val="102000"/>
-              </a:schemeClr>
-            </a:gs>
-            <a:gs pos="50000">
-              <a:schemeClr val="phClr">
-                <a:tint val="98000"/>
-                <a:satMod val="130000"/>
-                <a:shade val="90000"/>
-                <a:lumMod val="103000"/>
-              </a:schemeClr>
-            </a:gs>
-            <a:gs pos="100000">
-              <a:schemeClr val="phClr">
-                <a:shade val="63000"/>
-                <a:satMod val="120000"/>
-              </a:schemeClr>
-            </a:gs>
-          </a:gsLst>
-          <a:lin ang="5400000" scaled="0"/>
-        </a:gradFill>
-      </a:bgFillStyleLst>
-    </a:fmtScheme>
-  </a:themeElements>
-  <a:objectDefaults/>
-  <a:extraClrSchemeLst/>
-  <a:extLst>
-    <a:ext uri="{05A4C25C-085E-4340-85A3-A5531E510DB2}">
-      <thm15:themeFamily xmlns:thm15="http://schemas.microsoft.com/office/thememl/2012/main" name="SSE_Group_PowerPoint_Template use" id="{E4657FDB-B5CC-4A41-BF6D-183D81AD8D22}" vid="{1F5C7FD9-EB8F-2541-9465-A7ED68755437}"/>
-    </a:ext>
-  </a:extLst>
-</a:theme>
-</file>
-
-<file path=ppt/theme/theme3.xml><?xml version="1.0" encoding="utf-8"?>
-<a:theme xmlns:a="http://schemas.openxmlformats.org/drawingml/2006/main" name="Blank Slides">
-  <a:themeElements>
-    <a:clrScheme name="IFoA Colour Palette">
-      <a:dk1>
-        <a:srgbClr val="3F4548"/>
-      </a:dk1>
-      <a:lt1>
-        <a:srgbClr val="FEFFFF"/>
-      </a:lt1>
-      <a:dk2>
-        <a:srgbClr val="113458"/>
-      </a:dk2>
-      <a:lt2>
-        <a:srgbClr val="FCFDF8"/>
-      </a:lt2>
-      <a:accent1>
-        <a:srgbClr val="D9AB16"/>
-      </a:accent1>
-      <a:accent2>
-        <a:srgbClr val="D01E45"/>
-      </a:accent2>
-      <a:accent3>
-        <a:srgbClr val="EE741D"/>
-      </a:accent3>
-      <a:accent4>
-        <a:srgbClr val="11B3A2"/>
-      </a:accent4>
-      <a:accent5>
-        <a:srgbClr val="009CC8"/>
-      </a:accent5>
-      <a:accent6>
-        <a:srgbClr val="8F4693"/>
-      </a:accent6>
-      <a:hlink>
-        <a:srgbClr val="D9AB16"/>
-      </a:hlink>
-      <a:folHlink>
-        <a:srgbClr val="D9AB16"/>
       </a:folHlink>
     </a:clrScheme>
     <a:fontScheme name="Arial">
@@ -15607,250 +13811,4 @@
     </a:ext>
   </a:extLst>
 </a:theme>
-</file>
-
-<file path=customXml/item1.xml><?xml version="1.0" encoding="utf-8"?>
-<p:properties xmlns:p="http://schemas.microsoft.com/office/2006/metadata/properties" xmlns:xsi="http://www.w3.org/2001/XMLSchema-instance" xmlns:pc="http://schemas.microsoft.com/office/infopath/2007/PartnerControls">
-  <documentManagement>
-    <lcf76f155ced4ddcb4097134ff3c332f xmlns="427c8fa8-921c-4e76-a4fb-ab316639157b">
-      <Terms xmlns="http://schemas.microsoft.com/office/infopath/2007/PartnerControls"/>
-    </lcf76f155ced4ddcb4097134ff3c332f>
-    <TaxCatchAll xmlns="65ef3215-eb9b-4145-815e-654dd1e8af6c" xsi:nil="true"/>
-  </documentManagement>
-</p:properties>
-</file>
-
-<file path=customXml/item2.xml><?xml version="1.0" encoding="utf-8"?>
-<?mso-contentType ?>
-<FormTemplates xmlns="http://schemas.microsoft.com/sharepoint/v3/contenttype/forms">
-  <Display>DocumentLibraryForm</Display>
-  <Edit>DocumentLibraryForm</Edit>
-  <New>DocumentLibraryForm</New>
-</FormTemplates>
-</file>
-
-<file path=customXml/item3.xml><?xml version="1.0" encoding="utf-8"?>
-<ct:contentTypeSchema xmlns:ct="http://schemas.microsoft.com/office/2006/metadata/contentType" xmlns:ma="http://schemas.microsoft.com/office/2006/metadata/properties/metaAttributes" ct:_="" ma:_="" ma:contentTypeName="Document" ma:contentTypeID="0x010100C69BB5B017E57643A9010A728B58DA5C" ma:contentTypeVersion="11" ma:contentTypeDescription="Create a new document." ma:contentTypeScope="" ma:versionID="bd67bf6eceadae8e79de8d9500d269f0">
-  <xsd:schema xmlns:xsd="http://www.w3.org/2001/XMLSchema" xmlns:xs="http://www.w3.org/2001/XMLSchema" xmlns:p="http://schemas.microsoft.com/office/2006/metadata/properties" xmlns:ns2="427c8fa8-921c-4e76-a4fb-ab316639157b" xmlns:ns3="65ef3215-eb9b-4145-815e-654dd1e8af6c" targetNamespace="http://schemas.microsoft.com/office/2006/metadata/properties" ma:root="true" ma:fieldsID="543eb13995b4a5172de49f09202043c4" ns2:_="" ns3:_="">
-    <xsd:import namespace="427c8fa8-921c-4e76-a4fb-ab316639157b"/>
-    <xsd:import namespace="65ef3215-eb9b-4145-815e-654dd1e8af6c"/>
-    <xsd:element name="properties">
-      <xsd:complexType>
-        <xsd:sequence>
-          <xsd:element name="documentManagement">
-            <xsd:complexType>
-              <xsd:all>
-                <xsd:element ref="ns2:MediaServiceMetadata" minOccurs="0"/>
-                <xsd:element ref="ns2:MediaServiceFastMetadata" minOccurs="0"/>
-                <xsd:element ref="ns2:MediaServiceSearchProperties" minOccurs="0"/>
-                <xsd:element ref="ns2:MediaServiceDateTaken" minOccurs="0"/>
-                <xsd:element ref="ns2:lcf76f155ced4ddcb4097134ff3c332f" minOccurs="0"/>
-                <xsd:element ref="ns3:TaxCatchAll" minOccurs="0"/>
-                <xsd:element ref="ns2:MediaServiceOCR" minOccurs="0"/>
-                <xsd:element ref="ns2:MediaServiceGenerationTime" minOccurs="0"/>
-                <xsd:element ref="ns2:MediaServiceEventHashCode" minOccurs="0"/>
-                <xsd:element ref="ns2:MediaServiceLocation" minOccurs="0"/>
-              </xsd:all>
-            </xsd:complexType>
-          </xsd:element>
-        </xsd:sequence>
-      </xsd:complexType>
-    </xsd:element>
-  </xsd:schema>
-  <xsd:schema xmlns:xsd="http://www.w3.org/2001/XMLSchema" xmlns:xs="http://www.w3.org/2001/XMLSchema" xmlns:dms="http://schemas.microsoft.com/office/2006/documentManagement/types" xmlns:pc="http://schemas.microsoft.com/office/infopath/2007/PartnerControls" targetNamespace="427c8fa8-921c-4e76-a4fb-ab316639157b" elementFormDefault="qualified">
-    <xsd:import namespace="http://schemas.microsoft.com/office/2006/documentManagement/types"/>
-    <xsd:import namespace="http://schemas.microsoft.com/office/infopath/2007/PartnerControls"/>
-    <xsd:element name="MediaServiceMetadata" ma:index="8" nillable="true" ma:displayName="MediaServiceMetadata" ma:hidden="true" ma:internalName="MediaServiceMetadata" ma:readOnly="true">
-      <xsd:simpleType>
-        <xsd:restriction base="dms:Note"/>
-      </xsd:simpleType>
-    </xsd:element>
-    <xsd:element name="MediaServiceFastMetadata" ma:index="9" nillable="true" ma:displayName="MediaServiceFastMetadata" ma:hidden="true" ma:internalName="MediaServiceFastMetadata" ma:readOnly="true">
-      <xsd:simpleType>
-        <xsd:restriction base="dms:Note"/>
-      </xsd:simpleType>
-    </xsd:element>
-    <xsd:element name="MediaServiceSearchProperties" ma:index="10" nillable="true" ma:displayName="MediaServiceSearchProperties" ma:hidden="true" ma:internalName="MediaServiceSearchProperties" ma:readOnly="true">
-      <xsd:simpleType>
-        <xsd:restriction base="dms:Note"/>
-      </xsd:simpleType>
-    </xsd:element>
-    <xsd:element name="MediaServiceDateTaken" ma:index="11" nillable="true" ma:displayName="MediaServiceDateTaken" ma:hidden="true" ma:indexed="true" ma:internalName="MediaServiceDateTaken" ma:readOnly="true">
-      <xsd:simpleType>
-        <xsd:restriction base="dms:Text"/>
-      </xsd:simpleType>
-    </xsd:element>
-    <xsd:element name="lcf76f155ced4ddcb4097134ff3c332f" ma:index="13" nillable="true" ma:taxonomy="true" ma:internalName="lcf76f155ced4ddcb4097134ff3c332f" ma:taxonomyFieldName="MediaServiceImageTags" ma:displayName="Image Tags" ma:readOnly="false" ma:fieldId="{5cf76f15-5ced-4ddc-b409-7134ff3c332f}" ma:taxonomyMulti="true" ma:sspId="6c5664ec-2097-44f6-aef9-a995d752de49" ma:termSetId="09814cd3-568e-fe90-9814-8d621ff8fb84" ma:anchorId="fba54fb3-c3e1-fe81-a776-ca4b69148c4d" ma:open="true" ma:isKeyword="false">
-      <xsd:complexType>
-        <xsd:sequence>
-          <xsd:element ref="pc:Terms" minOccurs="0" maxOccurs="1"/>
-        </xsd:sequence>
-      </xsd:complexType>
-    </xsd:element>
-    <xsd:element name="MediaServiceOCR" ma:index="15" nillable="true" ma:displayName="Extracted Text" ma:internalName="MediaServiceOCR" ma:readOnly="true">
-      <xsd:simpleType>
-        <xsd:restriction base="dms:Note">
-          <xsd:maxLength value="255"/>
-        </xsd:restriction>
-      </xsd:simpleType>
-    </xsd:element>
-    <xsd:element name="MediaServiceGenerationTime" ma:index="16" nillable="true" ma:displayName="MediaServiceGenerationTime" ma:hidden="true" ma:internalName="MediaServiceGenerationTime" ma:readOnly="true">
-      <xsd:simpleType>
-        <xsd:restriction base="dms:Text"/>
-      </xsd:simpleType>
-    </xsd:element>
-    <xsd:element name="MediaServiceEventHashCode" ma:index="17" nillable="true" ma:displayName="MediaServiceEventHashCode" ma:hidden="true" ma:internalName="MediaServiceEventHashCode" ma:readOnly="true">
-      <xsd:simpleType>
-        <xsd:restriction base="dms:Text"/>
-      </xsd:simpleType>
-    </xsd:element>
-    <xsd:element name="MediaServiceLocation" ma:index="18" nillable="true" ma:displayName="Location" ma:indexed="true" ma:internalName="MediaServiceLocation" ma:readOnly="true">
-      <xsd:simpleType>
-        <xsd:restriction base="dms:Text"/>
-      </xsd:simpleType>
-    </xsd:element>
-  </xsd:schema>
-  <xsd:schema xmlns:xsd="http://www.w3.org/2001/XMLSchema" xmlns:xs="http://www.w3.org/2001/XMLSchema" xmlns:dms="http://schemas.microsoft.com/office/2006/documentManagement/types" xmlns:pc="http://schemas.microsoft.com/office/infopath/2007/PartnerControls" targetNamespace="65ef3215-eb9b-4145-815e-654dd1e8af6c" elementFormDefault="qualified">
-    <xsd:import namespace="http://schemas.microsoft.com/office/2006/documentManagement/types"/>
-    <xsd:import namespace="http://schemas.microsoft.com/office/infopath/2007/PartnerControls"/>
-    <xsd:element name="TaxCatchAll" ma:index="14" nillable="true" ma:displayName="Taxonomy Catch All Column" ma:hidden="true" ma:list="{afb8b92b-6d5c-4dd4-aa92-b0877018010c}" ma:internalName="TaxCatchAll" ma:showField="CatchAllData" ma:web="65ef3215-eb9b-4145-815e-654dd1e8af6c">
-      <xsd:complexType>
-        <xsd:complexContent>
-          <xsd:extension base="dms:MultiChoiceLookup">
-            <xsd:sequence>
-              <xsd:element name="Value" type="dms:Lookup" maxOccurs="unbounded" minOccurs="0" nillable="true"/>
-            </xsd:sequence>
-          </xsd:extension>
-        </xsd:complexContent>
-      </xsd:complexType>
-    </xsd:element>
-  </xsd:schema>
-  <xsd:schema xmlns="http://schemas.openxmlformats.org/package/2006/metadata/core-properties" xmlns:xsd="http://www.w3.org/2001/XMLSchema" xmlns:xsi="http://www.w3.org/2001/XMLSchema-instance" xmlns:dc="http://purl.org/dc/elements/1.1/" xmlns:dcterms="http://purl.org/dc/terms/" xmlns:odoc="http://schemas.microsoft.com/internal/obd" targetNamespace="http://schemas.openxmlformats.org/package/2006/metadata/core-properties" elementFormDefault="qualified" attributeFormDefault="unqualified" blockDefault="#all">
-    <xsd:import namespace="http://purl.org/dc/elements/1.1/" schemaLocation="http://dublincore.org/schemas/xmls/qdc/2003/04/02/dc.xsd"/>
-    <xsd:import namespace="http://purl.org/dc/terms/" schemaLocation="http://dublincore.org/schemas/xmls/qdc/2003/04/02/dcterms.xsd"/>
-    <xsd:element name="coreProperties" type="CT_coreProperties"/>
-    <xsd:complexType name="CT_coreProperties">
-      <xsd:all>
-        <xsd:element ref="dc:creator" minOccurs="0" maxOccurs="1"/>
-        <xsd:element ref="dcterms:created" minOccurs="0" maxOccurs="1"/>
-        <xsd:element ref="dc:identifier" minOccurs="0" maxOccurs="1"/>
-        <xsd:element name="contentType" minOccurs="0" maxOccurs="1" type="xsd:string" ma:index="0" ma:displayName="Content Type"/>
-        <xsd:element ref="dc:title" minOccurs="0" maxOccurs="1" ma:index="4" ma:displayName="Title"/>
-        <xsd:element ref="dc:subject" minOccurs="0" maxOccurs="1"/>
-        <xsd:element ref="dc:description" minOccurs="0" maxOccurs="1"/>
-        <xsd:element name="keywords" minOccurs="0" maxOccurs="1" type="xsd:string"/>
-        <xsd:element ref="dc:language" minOccurs="0" maxOccurs="1"/>
-        <xsd:element name="category" minOccurs="0" maxOccurs="1" type="xsd:string"/>
-        <xsd:element name="version" minOccurs="0" maxOccurs="1" type="xsd:string"/>
-        <xsd:element name="revision" minOccurs="0" maxOccurs="1" type="xsd:string">
-          <xsd:annotation>
-            <xsd:documentation>
-                        This value indicates the number of saves or revisions. The application is responsible for updating this value after each revision.
-                    </xsd:documentation>
-          </xsd:annotation>
-        </xsd:element>
-        <xsd:element name="lastModifiedBy" minOccurs="0" maxOccurs="1" type="xsd:string"/>
-        <xsd:element ref="dcterms:modified" minOccurs="0" maxOccurs="1"/>
-        <xsd:element name="contentStatus" minOccurs="0" maxOccurs="1" type="xsd:string"/>
-      </xsd:all>
-    </xsd:complexType>
-  </xsd:schema>
-  <xs:schema xmlns:pc="http://schemas.microsoft.com/office/infopath/2007/PartnerControls" xmlns:xs="http://www.w3.org/2001/XMLSchema" targetNamespace="http://schemas.microsoft.com/office/infopath/2007/PartnerControls" elementFormDefault="qualified" attributeFormDefault="unqualified">
-    <xs:element name="Person">
-      <xs:complexType>
-        <xs:sequence>
-          <xs:element ref="pc:DisplayName" minOccurs="0"/>
-          <xs:element ref="pc:AccountId" minOccurs="0"/>
-          <xs:element ref="pc:AccountType" minOccurs="0"/>
-        </xs:sequence>
-      </xs:complexType>
-    </xs:element>
-    <xs:element name="DisplayName" type="xs:string"/>
-    <xs:element name="AccountId" type="xs:string"/>
-    <xs:element name="AccountType" type="xs:string"/>
-    <xs:element name="BDCAssociatedEntity">
-      <xs:complexType>
-        <xs:sequence>
-          <xs:element ref="pc:BDCEntity" minOccurs="0" maxOccurs="unbounded"/>
-        </xs:sequence>
-        <xs:attribute ref="pc:EntityNamespace"/>
-        <xs:attribute ref="pc:EntityName"/>
-        <xs:attribute ref="pc:SystemInstanceName"/>
-        <xs:attribute ref="pc:AssociationName"/>
-      </xs:complexType>
-    </xs:element>
-    <xs:attribute name="EntityNamespace" type="xs:string"/>
-    <xs:attribute name="EntityName" type="xs:string"/>
-    <xs:attribute name="SystemInstanceName" type="xs:string"/>
-    <xs:attribute name="AssociationName" type="xs:string"/>
-    <xs:element name="BDCEntity">
-      <xs:complexType>
-        <xs:sequence>
-          <xs:element ref="pc:EntityDisplayName" minOccurs="0"/>
-          <xs:element ref="pc:EntityInstanceReference" minOccurs="0"/>
-          <xs:element ref="pc:EntityId1" minOccurs="0"/>
-          <xs:element ref="pc:EntityId2" minOccurs="0"/>
-          <xs:element ref="pc:EntityId3" minOccurs="0"/>
-          <xs:element ref="pc:EntityId4" minOccurs="0"/>
-          <xs:element ref="pc:EntityId5" minOccurs="0"/>
-        </xs:sequence>
-      </xs:complexType>
-    </xs:element>
-    <xs:element name="EntityDisplayName" type="xs:string"/>
-    <xs:element name="EntityInstanceReference" type="xs:string"/>
-    <xs:element name="EntityId1" type="xs:string"/>
-    <xs:element name="EntityId2" type="xs:string"/>
-    <xs:element name="EntityId3" type="xs:string"/>
-    <xs:element name="EntityId4" type="xs:string"/>
-    <xs:element name="EntityId5" type="xs:string"/>
-    <xs:element name="Terms">
-      <xs:complexType>
-        <xs:sequence>
-          <xs:element ref="pc:TermInfo" minOccurs="0" maxOccurs="unbounded"/>
-        </xs:sequence>
-      </xs:complexType>
-    </xs:element>
-    <xs:element name="TermInfo">
-      <xs:complexType>
-        <xs:sequence>
-          <xs:element ref="pc:TermName" minOccurs="0"/>
-          <xs:element ref="pc:TermId" minOccurs="0"/>
-        </xs:sequence>
-      </xs:complexType>
-    </xs:element>
-    <xs:element name="TermName" type="xs:string"/>
-    <xs:element name="TermId" type="xs:string"/>
-  </xs:schema>
-</ct:contentTypeSchema>
-</file>
-
-<file path=customXml/itemProps1.xml><?xml version="1.0" encoding="utf-8"?>
-<ds:datastoreItem xmlns:ds="http://schemas.openxmlformats.org/officeDocument/2006/customXml" ds:itemID="{6FF5F813-550E-4BB5-ADE3-752FACD4D223}">
-  <ds:schemaRefs>
-    <ds:schemaRef ds:uri="http://purl.org/dc/terms/"/>
-    <ds:schemaRef ds:uri="82fe6656-41d8-448e-9020-eff81fcda23a"/>
-    <ds:schemaRef ds:uri="http://www.w3.org/XML/1998/namespace"/>
-    <ds:schemaRef ds:uri="http://schemas.microsoft.com/office/infopath/2007/PartnerControls"/>
-    <ds:schemaRef ds:uri="http://schemas.microsoft.com/office/2006/documentManagement/types"/>
-    <ds:schemaRef ds:uri="http://purl.org/dc/elements/1.1/"/>
-    <ds:schemaRef ds:uri="8a146ac8-57b8-400b-9b4e-17fb74d8cc93"/>
-    <ds:schemaRef ds:uri="http://schemas.microsoft.com/office/2006/metadata/properties"/>
-    <ds:schemaRef ds:uri="http://schemas.openxmlformats.org/package/2006/metadata/core-properties"/>
-    <ds:schemaRef ds:uri="http://purl.org/dc/dcmitype/"/>
-    <ds:schemaRef ds:uri="427c8fa8-921c-4e76-a4fb-ab316639157b"/>
-    <ds:schemaRef ds:uri="65ef3215-eb9b-4145-815e-654dd1e8af6c"/>
-  </ds:schemaRefs>
-</ds:datastoreItem>
-</file>
-
-<file path=customXml/itemProps2.xml><?xml version="1.0" encoding="utf-8"?>
-<ds:datastoreItem xmlns:ds="http://schemas.openxmlformats.org/officeDocument/2006/customXml" ds:itemID="{40C26788-4DC2-436E-8A96-8EFF94E1844A}">
-  <ds:schemaRefs>
-    <ds:schemaRef ds:uri="http://schemas.microsoft.com/sharepoint/v3/contenttype/forms"/>
-  </ds:schemaRefs>
-</ds:datastoreItem>
-</file>
-
-<file path=customXml/itemProps3.xml><?xml version="1.0" encoding="utf-8"?>
-<ds:datastoreItem xmlns:ds="http://schemas.openxmlformats.org/officeDocument/2006/customXml" ds:itemID="{BF32AE18-B89B-4431-8724-411DE5932123}"/>
 </file>